--- a/mkt1107/output/MKT1107_W09_slides.pptx
+++ b/mkt1107/output/MKT1107_W09_slides.pptx
@@ -166,25 +166,25 @@
   <p:extLst>
     <p:ext uri="{521415D9-36F7-43E2-AB2F-B90AF26B5E84}">
       <p14:sectionLst xmlns:p14="http://schemas.microsoft.com/office/powerpoint/2010/main">
-        <p14:section name="Mở đầu" id="{aa58ca74-0543-2d6b-3158-988360008231}">
+        <p14:section name="Mở đầu" id="{05e4ee7f-e069-14f6-b48f-60ffa2a682bc}">
           <p14:sldIdLst>
             <p14:sldId id="256"/>
           </p14:sldIdLst>
         </p14:section>
-        <p14:section name="S1 · Kiểm tra kế hoạch chọn mẫu" id="{fc54542e-cc7b-0d12-00c5-c6357706a6a0}">
+        <p14:section name="S1 · Kiểm tra kế hoạch chọn mẫu" id="{5a80a149-0c41-a4d0-9251-3a03cdb67b63}">
           <p14:sldIdLst>
             <p14:sldId id="257"/>
             <p14:sldId id="258"/>
           </p14:sldIdLst>
         </p14:section>
-        <p14:section name="S2 · Khởi động: một ly trà sữa ngon bao nhiêu?" id="{c89d2ee9-e294-8c2c-2029-2c7e6e7ec882}">
+        <p14:section name="S2 · Khởi động: một ly trà sữa ngon bao nhiêu?" id="{00553ca1-f91f-75ba-bafe-a5eb55185e2c}">
           <p14:sldIdLst>
             <p14:sldId id="259"/>
             <p14:sldId id="260"/>
             <p14:sldId id="261"/>
           </p14:sldIdLst>
         </p14:section>
-        <p14:section name="S3 · 7.1 Đo lường" id="{08a8a7d0-0f0b-6d5d-65a1-5e4aa3b0140c}">
+        <p14:section name="S3 · 7.1 Đo lường" id="{57a963b2-e197-47d8-225d-f85835f55a2c}">
           <p14:sldIdLst>
             <p14:sldId id="262"/>
             <p14:sldId id="263"/>
@@ -194,7 +194,7 @@
             <p14:sldId id="267"/>
           </p14:sldIdLst>
         </p14:section>
-        <p14:section name="S4 · 7.2 Các loại thang đo" id="{7a13ee9a-ba2f-8f44-caaa-d7494fce2430}">
+        <p14:section name="S4 · 7.2 Các loại thang đo" id="{a09fc1d7-b4ab-914e-fda2-5b1fa681e1f7}">
           <p14:sldIdLst>
             <p14:sldId id="268"/>
             <p14:sldId id="269"/>
@@ -210,7 +210,7 @@
             <p14:sldId id="279"/>
           </p14:sldIdLst>
         </p14:section>
-        <p14:section name="S5 · 7.3 Cấp thang đo và độ mạnh của chúng" id="{b257aa5c-7872-cbfd-982a-3598f2c31244}">
+        <p14:section name="S5 · 7.3 Cấp thang đo và độ mạnh của chúng" id="{9e7593af-31bd-9ac6-ad16-39bc6ebbe4f6}">
           <p14:sldIdLst>
             <p14:sldId id="280"/>
             <p14:sldId id="281"/>
@@ -219,7 +219,7 @@
             <p14:sldId id="284"/>
           </p14:sldIdLst>
         </p14:section>
-        <p14:section name="S6 · Đố cấp thang đo" id="{e24026f5-9dcd-40bb-f995-ef5e0868cecf}">
+        <p14:section name="S6 · Đố cấp thang đo" id="{a9fd7b2d-8226-a258-edac-c06620475791}">
           <p14:sldIdLst>
             <p14:sldId id="285"/>
             <p14:sldId id="286"/>
@@ -233,7 +233,7 @@
             <p14:sldId id="294"/>
           </p14:sldIdLst>
         </p14:section>
-        <p14:section name="S7 · 7.4 Đánh giá đo lường" id="{f2907713-f6cd-3003-d198-733407828606}">
+        <p14:section name="S7 · 7.4 Đánh giá đo lường" id="{55d13572-c124-6f2c-35b9-ea717be72bc3}">
           <p14:sldIdLst>
             <p14:sldId id="295"/>
             <p14:sldId id="296"/>
@@ -247,7 +247,7 @@
             <p14:sldId id="304"/>
           </p14:sldIdLst>
         </p14:section>
-        <p14:section name="S8 · Đảo mã, các loại biến và mô hình nghiên cứu" id="{fe6bcc41-263c-fe7e-c2f0-7c0cfed88ae2}">
+        <p14:section name="S8 · Đảo mã, các loại biến và mô hình nghiên cứu" id="{e71d1fa6-1065-e704-5a96-df19abd17516}">
           <p14:sldIdLst>
             <p14:sldId id="305"/>
             <p14:sldId id="306"/>
@@ -255,13 +255,13 @@
             <p14:sldId id="308"/>
           </p14:sldIdLst>
         </p14:section>
-        <p14:section name="S9 · Thực hành nhóm: Xưởng thang đo" id="{27724b61-5965-a41e-a69e-de3a4f2b4456}">
+        <p14:section name="S9 · Thực hành nhóm: Xưởng thang đo" id="{5f14fdd6-cc7d-a06b-e3a8-905787298c45}">
           <p14:sldIdLst>
             <p14:sldId id="309"/>
             <p14:sldId id="310"/>
           </p14:sldIdLst>
         </p14:section>
-        <p14:section name="S10 · Kết buổi" id="{a4c78f7c-255c-5abb-3597-7c7687c38e55}">
+        <p14:section name="S10 · Kết buổi" id="{14a29b67-9874-43da-f5a6-1d80c8426279}">
           <p14:sldIdLst>
             <p14:sldId id="311"/>
             <p14:sldId id="312"/>

--- a/mkt1107/output/MKT1107_W09_slides.pptx
+++ b/mkt1107/output/MKT1107_W09_slides.pptx
@@ -166,25 +166,25 @@
   <p:extLst>
     <p:ext uri="{521415D9-36F7-43E2-AB2F-B90AF26B5E84}">
       <p14:sectionLst xmlns:p14="http://schemas.microsoft.com/office/powerpoint/2010/main">
-        <p14:section name="Mở đầu" id="{05e4ee7f-e069-14f6-b48f-60ffa2a682bc}">
+        <p14:section name="Mở đầu" id="{17c4016c-8c6a-6633-3994-532ec767d2bd}">
           <p14:sldIdLst>
             <p14:sldId id="256"/>
           </p14:sldIdLst>
         </p14:section>
-        <p14:section name="S1 · Kiểm tra kế hoạch chọn mẫu" id="{5a80a149-0c41-a4d0-9251-3a03cdb67b63}">
+        <p14:section name="S1 · Kiểm tra kế hoạch chọn mẫu" id="{2b0484bb-b912-e0d9-cfad-59326e2c45e1}">
           <p14:sldIdLst>
             <p14:sldId id="257"/>
             <p14:sldId id="258"/>
           </p14:sldIdLst>
         </p14:section>
-        <p14:section name="S2 · Khởi động: một ly trà sữa ngon bao nhiêu?" id="{00553ca1-f91f-75ba-bafe-a5eb55185e2c}">
+        <p14:section name="S2 · Khởi động: một ly trà sữa ngon bao nhiêu?" id="{9cec2889-4f7c-3434-0951-1e9172006a13}">
           <p14:sldIdLst>
             <p14:sldId id="259"/>
             <p14:sldId id="260"/>
             <p14:sldId id="261"/>
           </p14:sldIdLst>
         </p14:section>
-        <p14:section name="S3 · 7.1 Đo lường" id="{57a963b2-e197-47d8-225d-f85835f55a2c}">
+        <p14:section name="S3 · 7.1 Đo lường" id="{8eb9f3d2-639c-8495-b9bd-b9a95125de51}">
           <p14:sldIdLst>
             <p14:sldId id="262"/>
             <p14:sldId id="263"/>
@@ -194,7 +194,7 @@
             <p14:sldId id="267"/>
           </p14:sldIdLst>
         </p14:section>
-        <p14:section name="S4 · 7.2 Các loại thang đo" id="{a09fc1d7-b4ab-914e-fda2-5b1fa681e1f7}">
+        <p14:section name="S4 · 7.2 Các loại thang đo" id="{869845c4-aa94-e7c4-7ef1-899423109e0c}">
           <p14:sldIdLst>
             <p14:sldId id="268"/>
             <p14:sldId id="269"/>
@@ -210,7 +210,7 @@
             <p14:sldId id="279"/>
           </p14:sldIdLst>
         </p14:section>
-        <p14:section name="S5 · 7.3 Cấp thang đo và độ mạnh của chúng" id="{9e7593af-31bd-9ac6-ad16-39bc6ebbe4f6}">
+        <p14:section name="S5 · 7.3 Cấp thang đo và độ mạnh của chúng" id="{ebcb68c0-3aab-4601-d6f9-eb2c1d2f7c13}">
           <p14:sldIdLst>
             <p14:sldId id="280"/>
             <p14:sldId id="281"/>
@@ -219,7 +219,7 @@
             <p14:sldId id="284"/>
           </p14:sldIdLst>
         </p14:section>
-        <p14:section name="S6 · Đố cấp thang đo" id="{a9fd7b2d-8226-a258-edac-c06620475791}">
+        <p14:section name="S6 · Đố cấp thang đo" id="{e1f232a0-c545-8237-87b4-74be8fae2fdd}">
           <p14:sldIdLst>
             <p14:sldId id="285"/>
             <p14:sldId id="286"/>
@@ -233,7 +233,7 @@
             <p14:sldId id="294"/>
           </p14:sldIdLst>
         </p14:section>
-        <p14:section name="S7 · 7.4 Đánh giá đo lường" id="{55d13572-c124-6f2c-35b9-ea717be72bc3}">
+        <p14:section name="S7 · 7.4 Đánh giá đo lường" id="{162ba704-3735-a682-a084-f6a6893dc84a}">
           <p14:sldIdLst>
             <p14:sldId id="295"/>
             <p14:sldId id="296"/>
@@ -247,7 +247,7 @@
             <p14:sldId id="304"/>
           </p14:sldIdLst>
         </p14:section>
-        <p14:section name="S8 · Đảo mã, các loại biến và mô hình nghiên cứu" id="{e71d1fa6-1065-e704-5a96-df19abd17516}">
+        <p14:section name="S8 · Đảo mã, các loại biến và mô hình nghiên cứu" id="{cb12550f-6ae5-cc94-2b6a-fa49c7454901}">
           <p14:sldIdLst>
             <p14:sldId id="305"/>
             <p14:sldId id="306"/>
@@ -255,13 +255,13 @@
             <p14:sldId id="308"/>
           </p14:sldIdLst>
         </p14:section>
-        <p14:section name="S9 · Thực hành nhóm: Xưởng thang đo" id="{5f14fdd6-cc7d-a06b-e3a8-905787298c45}">
+        <p14:section name="S9 · Thực hành nhóm: Xưởng thang đo" id="{1985494c-4df0-770a-dd0e-2117cb39160c}">
           <p14:sldIdLst>
             <p14:sldId id="309"/>
             <p14:sldId id="310"/>
           </p14:sldIdLst>
         </p14:section>
-        <p14:section name="S10 · Kết buổi" id="{14a29b67-9874-43da-f5a6-1d80c8426279}">
+        <p14:section name="S10 · Kết buổi" id="{b1ab4eed-a5ea-0cc5-4fae-23f5351e9498}">
           <p14:sldIdLst>
             <p14:sldId id="311"/>
             <p14:sldId id="312"/>

--- a/mkt1107/output/MKT1107_W09_slides.pptx
+++ b/mkt1107/output/MKT1107_W09_slides.pptx
@@ -166,25 +166,25 @@
   <p:extLst>
     <p:ext uri="{521415D9-36F7-43E2-AB2F-B90AF26B5E84}">
       <p14:sectionLst xmlns:p14="http://schemas.microsoft.com/office/powerpoint/2010/main">
-        <p14:section name="Mở đầu" id="{17c4016c-8c6a-6633-3994-532ec767d2bd}">
+        <p14:section name="Mở đầu" id="{0007a40c-2700-b98f-6c44-b3e97a06f4ab}">
           <p14:sldIdLst>
             <p14:sldId id="256"/>
           </p14:sldIdLst>
         </p14:section>
-        <p14:section name="S1 · Kiểm tra kế hoạch chọn mẫu" id="{2b0484bb-b912-e0d9-cfad-59326e2c45e1}">
+        <p14:section name="S1 · Kiểm tra kế hoạch chọn mẫu" id="{6e2fb0ea-0956-9841-92d8-4a6a7b3cbc5c}">
           <p14:sldIdLst>
             <p14:sldId id="257"/>
             <p14:sldId id="258"/>
           </p14:sldIdLst>
         </p14:section>
-        <p14:section name="S2 · Khởi động: một ly trà sữa ngon bao nhiêu?" id="{9cec2889-4f7c-3434-0951-1e9172006a13}">
+        <p14:section name="S2 · Khởi động: một ly trà sữa ngon bao nhiêu?" id="{dcadc27d-f45c-e69f-19b2-5a5e673a6acd}">
           <p14:sldIdLst>
             <p14:sldId id="259"/>
             <p14:sldId id="260"/>
             <p14:sldId id="261"/>
           </p14:sldIdLst>
         </p14:section>
-        <p14:section name="S3 · 7.1 Đo lường" id="{8eb9f3d2-639c-8495-b9bd-b9a95125de51}">
+        <p14:section name="S3 · 7.1 Đo lường" id="{cdeb7723-23d1-63e9-730f-a0de2ae5494d}">
           <p14:sldIdLst>
             <p14:sldId id="262"/>
             <p14:sldId id="263"/>
@@ -194,7 +194,7 @@
             <p14:sldId id="267"/>
           </p14:sldIdLst>
         </p14:section>
-        <p14:section name="S4 · 7.2 Các loại thang đo" id="{869845c4-aa94-e7c4-7ef1-899423109e0c}">
+        <p14:section name="S4 · 7.2 Các loại thang đo" id="{159bb4ef-f589-5ba3-3008-17d9a77b0f59}">
           <p14:sldIdLst>
             <p14:sldId id="268"/>
             <p14:sldId id="269"/>
@@ -210,7 +210,7 @@
             <p14:sldId id="279"/>
           </p14:sldIdLst>
         </p14:section>
-        <p14:section name="S5 · 7.3 Cấp thang đo và độ mạnh của chúng" id="{ebcb68c0-3aab-4601-d6f9-eb2c1d2f7c13}">
+        <p14:section name="S5 · 7.3 Cấp thang đo và độ mạnh của chúng" id="{7baa507b-49ce-3e4a-69ad-8b7cbf63030a}">
           <p14:sldIdLst>
             <p14:sldId id="280"/>
             <p14:sldId id="281"/>
@@ -219,7 +219,7 @@
             <p14:sldId id="284"/>
           </p14:sldIdLst>
         </p14:section>
-        <p14:section name="S6 · Đố cấp thang đo" id="{e1f232a0-c545-8237-87b4-74be8fae2fdd}">
+        <p14:section name="S6 · Đố cấp thang đo" id="{086f40c8-6e9b-802c-e641-0cd52bbc49b2}">
           <p14:sldIdLst>
             <p14:sldId id="285"/>
             <p14:sldId id="286"/>
@@ -233,7 +233,7 @@
             <p14:sldId id="294"/>
           </p14:sldIdLst>
         </p14:section>
-        <p14:section name="S7 · 7.4 Đánh giá đo lường" id="{162ba704-3735-a682-a084-f6a6893dc84a}">
+        <p14:section name="S7 · 7.4 Đánh giá đo lường" id="{b54f5986-7d49-c497-58ff-f9bfad9f494d}">
           <p14:sldIdLst>
             <p14:sldId id="295"/>
             <p14:sldId id="296"/>
@@ -247,7 +247,7 @@
             <p14:sldId id="304"/>
           </p14:sldIdLst>
         </p14:section>
-        <p14:section name="S8 · Đảo mã, các loại biến và mô hình nghiên cứu" id="{cb12550f-6ae5-cc94-2b6a-fa49c7454901}">
+        <p14:section name="S8 · Đảo mã, các loại biến và mô hình nghiên cứu" id="{6f07ed84-5a00-7201-bf6b-804e12c0371b}">
           <p14:sldIdLst>
             <p14:sldId id="305"/>
             <p14:sldId id="306"/>
@@ -255,13 +255,13 @@
             <p14:sldId id="308"/>
           </p14:sldIdLst>
         </p14:section>
-        <p14:section name="S9 · Thực hành nhóm: Xưởng thang đo" id="{1985494c-4df0-770a-dd0e-2117cb39160c}">
+        <p14:section name="S9 · Thực hành nhóm: Xưởng thang đo" id="{500c3982-9983-2d17-bda4-89de95965445}">
           <p14:sldIdLst>
             <p14:sldId id="309"/>
             <p14:sldId id="310"/>
           </p14:sldIdLst>
         </p14:section>
-        <p14:section name="S10 · Kết buổi" id="{b1ab4eed-a5ea-0cc5-4fae-23f5351e9498}">
+        <p14:section name="S10 · Kết buổi" id="{4270333c-1b33-314e-2a5e-cb9ed5fdc499}">
           <p14:sldIdLst>
             <p14:sldId id="311"/>
             <p14:sldId id="312"/>
@@ -8068,7 +8068,7 @@
                           <a:ea typeface="Alexandria" pitchFamily="34" charset="-122"/>
                           <a:cs typeface="Alexandria" pitchFamily="34" charset="-120"/>
                         </a:rPr>
-                        <a:t>Công cụ gán số cho câu trả lời</a:t>
+                        <a:t>Công cụ gán số cho câu trả lời</a:t>
                       </a:r>
                       <a:endParaRPr lang="en-US" sz="2400" dirty="0">
                         <a:latin typeface="Alexandria" charset="0"/>
@@ -8651,7 +8651,7 @@
                 <a:ea typeface="Alexandria" pitchFamily="34" charset="-122"/>
                 <a:cs typeface="Alexandria" pitchFamily="34" charset="-120"/>
               </a:rPr>
-              <a:t>Mỗi con số chỉ đại diện cho một mức độ hoặc một phạm trù</a:t>
+              <a:t>Mỗi con số chỉ đại diện cho một mức độ hoặc một phạm trù</a:t>
             </a:r>
             <a:endParaRPr lang="en-US" sz="2600" dirty="0"/>
           </a:p>
@@ -10644,7 +10644,7 @@
                 <a:ea typeface="Alexandria" pitchFamily="34" charset="-122"/>
                 <a:cs typeface="Alexandria" pitchFamily="34" charset="-120"/>
               </a:rPr>
-              <a:t>Khoảng cách đều</a:t>
+              <a:t>Khoảng cách đều</a:t>
             </a:r>
             <a:endParaRPr lang="en-US" sz="2600" dirty="0"/>
           </a:p>
@@ -10809,7 +10809,7 @@
                 <a:ea typeface="Alexandria" pitchFamily="34" charset="-122"/>
                 <a:cs typeface="Alexandria" pitchFamily="34" charset="-120"/>
               </a:rPr>
-              <a:t>Có điểm 0 thật</a:t>
+              <a:t>Điểm 0 thật</a:t>
             </a:r>
             <a:endParaRPr lang="en-US" sz="2600" dirty="0"/>
           </a:p>
@@ -16451,7 +16451,7 @@
                 <a:ea typeface="Alexandria" pitchFamily="34" charset="-122"/>
                 <a:cs typeface="Alexandria" pitchFamily="34" charset="-120"/>
               </a:rPr>
-              <a:t>Nhân viên cửa hàng XYZ · từ -5 đến +5, không có điểm 0</a:t>
+              <a:t>Nhân viên cửa hàng XYZ · từ -5 đến +5, không có điểm 0</a:t>
             </a:r>
             <a:endParaRPr lang="en-US" sz="2600" dirty="0"/>
           </a:p>
@@ -19289,10 +19289,10 @@
             <a:tbl>
               <a:tblPr/>
               <a:tblGrid>
-                <a:gridCol w="2099871"/>
-                <a:gridCol w="2601324"/>
-                <a:gridCol w="2577810"/>
-                <a:gridCol w="3785235"/>
+                <a:gridCol w="2285828"/>
+                <a:gridCol w="2285828"/>
+                <a:gridCol w="2285828"/>
+                <a:gridCol w="4206757"/>
               </a:tblGrid>
               <a:tr h="524256">
                 <a:tc>
@@ -19866,7 +19866,7 @@
                   </a:tcPr>
                 </a:tc>
               </a:tr>
-              <a:tr h="920496">
+              <a:tr h="524256">
                 <a:tc>
                   <a:txBody>
                     <a:bodyPr/>
@@ -20029,7 +20029,7 @@
                           <a:ea typeface="Alexandria" pitchFamily="34" charset="-122"/>
                           <a:cs typeface="Alexandria" pitchFamily="34" charset="-120"/>
                         </a:rPr>
-                        <a:t>+ So sánh hơn kém</a:t>
+                        <a:t>+ So sánh</a:t>
                       </a:r>
                       <a:endParaRPr lang="en-US" sz="2400" dirty="0">
                         <a:latin typeface="Alexandria" charset="0"/>
@@ -20244,7 +20244,7 @@
                           <a:ea typeface="Alexandria" pitchFamily="34" charset="-122"/>
                           <a:cs typeface="Alexandria" pitchFamily="34" charset="-120"/>
                         </a:rPr>
-                        <a:t>+ Khoảng cách đều</a:t>
+                        <a:t>+ Cách đều</a:t>
                       </a:r>
                       <a:endParaRPr lang="en-US" sz="2400" dirty="0">
                         <a:latin typeface="Alexandria" charset="0"/>
@@ -20386,7 +20386,31 @@
                           <a:ea typeface="Alexandria" pitchFamily="34" charset="-122"/>
                           <a:cs typeface="Alexandria" pitchFamily="34" charset="-120"/>
                         </a:rPr>
-                        <a:t>+ Trung bình, độ lệch chuẩn</a:t>
+                        <a:t>+ Trung bình,</a:t>
+                      </a:r>
+                      <a:endParaRPr lang="en-US" sz="2400" dirty="0">
+                        <a:latin typeface="Alexandria" charset="0"/>
+                        <a:ea typeface="Alexandria" charset="0"/>
+                        <a:cs typeface="Alexandria" charset="0"/>
+                      </a:endParaRPr>
+                    </a:p>
+                    <a:p>
+                      <a:pPr indent="0" marL="0">
+                        <a:lnSpc>
+                          <a:spcPts val="3100"/>
+                        </a:lnSpc>
+                        <a:buNone/>
+                      </a:pPr>
+                      <a:r>
+                        <a:rPr lang="en-US" sz="2400" dirty="0">
+                          <a:solidFill>
+                            <a:srgbClr val="2E2A3A"/>
+                          </a:solidFill>
+                          <a:latin typeface="Alexandria" pitchFamily="34" charset="0"/>
+                          <a:ea typeface="Alexandria" pitchFamily="34" charset="-122"/>
+                          <a:cs typeface="Alexandria" pitchFamily="34" charset="-120"/>
+                        </a:rPr>
+                        <a:t>độ lệch chuẩn</a:t>
                       </a:r>
                       <a:endParaRPr lang="en-US" sz="2400" dirty="0">
                         <a:latin typeface="Alexandria" charset="0"/>
@@ -20438,7 +20462,7 @@
                   </a:tcPr>
                 </a:tc>
               </a:tr>
-              <a:tr h="920496">
+              <a:tr h="524256">
                 <a:tc>
                   <a:txBody>
                     <a:bodyPr/>
@@ -20530,7 +20554,7 @@
                           <a:ea typeface="Alexandria" pitchFamily="34" charset="-122"/>
                           <a:cs typeface="Alexandria" pitchFamily="34" charset="-120"/>
                         </a:rPr>
-                        <a:t>+ Điểm 0 tuyệt đối</a:t>
+                        <a:t>+ Điểm 0 thật</a:t>
                       </a:r>
                       <a:endParaRPr lang="en-US" sz="2400" dirty="0">
                         <a:latin typeface="Alexandria" charset="0"/>
@@ -21044,7 +21068,7 @@
                 <a:ea typeface="Alexandria" pitchFamily="34" charset="-122"/>
                 <a:cs typeface="Alexandria" pitchFamily="34" charset="-120"/>
               </a:rPr>
-              <a:t>“Hạng trung bình của B là 1,52”</a:t>
+              <a:t>“Hạng trung bình của B là 1,52”</a:t>
             </a:r>
             <a:endParaRPr lang="en-US" sz="2700" dirty="0"/>
           </a:p>
@@ -21106,7 +21130,7 @@
                 <a:ea typeface="Alexandria" pitchFamily="34" charset="-122"/>
                 <a:cs typeface="Alexandria" pitchFamily="34" charset="-120"/>
               </a:rPr>
-              <a:t>“A (4,5) hài lòng gấp đôi B (2,3)”</a:t>
+              <a:t>“A (4,5) hài lòng gấp đôi B (2,3)”</a:t>
             </a:r>
             <a:endParaRPr lang="en-US" sz="2700" dirty="0"/>
           </a:p>
@@ -21378,7 +21402,7 @@
                 <a:ea typeface="Alexandria" pitchFamily="34" charset="-122"/>
                 <a:cs typeface="Alexandria" pitchFamily="34" charset="-120"/>
               </a:rPr>
-              <a:t>“Điểm khu vực A cao hơn B”</a:t>
+              <a:t>“Điểm khu vực A cao hơn B”</a:t>
             </a:r>
             <a:endParaRPr lang="en-US" sz="2700" dirty="0"/>
           </a:p>
@@ -22967,7 +22991,7 @@
                 <a:ea typeface="Alexandria" pitchFamily="34" charset="-122"/>
                 <a:cs typeface="Alexandria" pitchFamily="34" charset="-120"/>
               </a:rPr>
-              <a:t>Đọc lại kế hoạch phân tích trong đề cương nhóm trước khi viết câu hỏi</a:t>
+              <a:t>Đọc lại kế hoạch phân tích trong đề cương nhóm trước khi viết câu hỏi</a:t>
             </a:r>
             <a:endParaRPr lang="en-US" sz="2600" dirty="0"/>
           </a:p>
@@ -27883,7 +27907,7 @@
                 <a:ea typeface="Alexandria" pitchFamily="34" charset="-122"/>
                 <a:cs typeface="Alexandria" pitchFamily="34" charset="-120"/>
               </a:rPr>
-              <a:t>Thu nhập: Dưới 5 triệu · 5–10 triệu · Trên 10 triệu</a:t>
+              <a:t>Thu nhập (triệu đồng): Dưới 5 · 5–10 · Trên 10</a:t>
             </a:r>
             <a:endParaRPr lang="en-US" sz="2600" dirty="0"/>
           </a:p>
@@ -28416,10 +28440,10 @@
             <a:tbl>
               <a:tblPr/>
               <a:tblGrid>
-                <a:gridCol w="2314972"/>
-                <a:gridCol w="2492815"/>
-                <a:gridCol w="3941481"/>
-                <a:gridCol w="2314972"/>
+                <a:gridCol w="2278962"/>
+                <a:gridCol w="2540093"/>
+                <a:gridCol w="3966224"/>
+                <a:gridCol w="2278962"/>
               </a:tblGrid>
               <a:tr h="524256">
                 <a:tc>
@@ -29371,7 +29395,31 @@
                           <a:ea typeface="Alexandria" pitchFamily="34" charset="-122"/>
                           <a:cs typeface="Alexandria" pitchFamily="34" charset="-120"/>
                         </a:rPr>
-                        <a:t>Quãng (quy ước)</a:t>
+                        <a:t>Quãng</a:t>
+                      </a:r>
+                      <a:endParaRPr lang="en-US" sz="2400" dirty="0">
+                        <a:latin typeface="Alexandria" charset="0"/>
+                        <a:ea typeface="Alexandria" charset="0"/>
+                        <a:cs typeface="Alexandria" charset="0"/>
+                      </a:endParaRPr>
+                    </a:p>
+                    <a:p>
+                      <a:pPr indent="0" marL="0">
+                        <a:lnSpc>
+                          <a:spcPts val="3100"/>
+                        </a:lnSpc>
+                        <a:buNone/>
+                      </a:pPr>
+                      <a:r>
+                        <a:rPr lang="en-US" sz="2400" dirty="0">
+                          <a:solidFill>
+                            <a:srgbClr val="2E2A3A"/>
+                          </a:solidFill>
+                          <a:latin typeface="Alexandria" pitchFamily="34" charset="0"/>
+                          <a:ea typeface="Alexandria" pitchFamily="34" charset="-122"/>
+                          <a:cs typeface="Alexandria" pitchFamily="34" charset="-120"/>
+                        </a:rPr>
+                        <a:t>(quy ước)</a:t>
                       </a:r>
                       <a:endParaRPr lang="en-US" sz="2400" dirty="0">
                         <a:latin typeface="Alexandria" charset="0"/>
@@ -29442,7 +29490,31 @@
                           <a:ea typeface="Alexandria" pitchFamily="34" charset="-122"/>
                           <a:cs typeface="Alexandria" pitchFamily="34" charset="-120"/>
                         </a:rPr>
-                        <a:t>Trung bình, độ lệch chuẩn</a:t>
+                        <a:t>Trung bình,</a:t>
+                      </a:r>
+                      <a:endParaRPr lang="en-US" sz="2400" dirty="0">
+                        <a:latin typeface="Alexandria" charset="0"/>
+                        <a:ea typeface="Alexandria" charset="0"/>
+                        <a:cs typeface="Alexandria" charset="0"/>
+                      </a:endParaRPr>
+                    </a:p>
+                    <a:p>
+                      <a:pPr indent="0" marL="0">
+                        <a:lnSpc>
+                          <a:spcPts val="3100"/>
+                        </a:lnSpc>
+                        <a:buNone/>
+                      </a:pPr>
+                      <a:r>
+                        <a:rPr lang="en-US" sz="2400" dirty="0">
+                          <a:solidFill>
+                            <a:srgbClr val="2E2A3A"/>
+                          </a:solidFill>
+                          <a:latin typeface="Alexandria" pitchFamily="34" charset="0"/>
+                          <a:ea typeface="Alexandria" pitchFamily="34" charset="-122"/>
+                          <a:cs typeface="Alexandria" pitchFamily="34" charset="-120"/>
+                        </a:rPr>
+                        <a:t>độ lệch chuẩn</a:t>
                       </a:r>
                       <a:endParaRPr lang="en-US" sz="2400" dirty="0">
                         <a:latin typeface="Alexandria" charset="0"/>
@@ -35403,7 +35475,7 @@
                 <a:ea typeface="Alexandria" pitchFamily="34" charset="-122"/>
                 <a:cs typeface="Alexandria" pitchFamily="34" charset="-120"/>
               </a:rPr>
-              <a:t>Làm trên điện thoại</a:t>
+              <a:t>Làm trên điện thoại</a:t>
             </a:r>
             <a:endParaRPr lang="en-US" sz="2600" dirty="0"/>
           </a:p>
@@ -35568,7 +35640,7 @@
                 <a:ea typeface="Alexandria" pitchFamily="34" charset="-122"/>
                 <a:cs typeface="Alexandria" pitchFamily="34" charset="-120"/>
               </a:rPr>
-              <a:t>Mỗi người hiểu khác</a:t>
+              <a:t>Mỗi người hiểu khác</a:t>
             </a:r>
             <a:endParaRPr lang="en-US" sz="2600" dirty="0"/>
           </a:p>
@@ -35733,7 +35805,7 @@
                 <a:ea typeface="Alexandria" pitchFamily="34" charset="-122"/>
                 <a:cs typeface="Alexandria" pitchFamily="34" charset="-120"/>
               </a:rPr>
-              <a:t>Môi trường xao nhãng</a:t>
+              <a:t>Môi trường xao nhãng</a:t>
             </a:r>
             <a:endParaRPr lang="en-US" sz="2600" dirty="0"/>
           </a:p>
@@ -36732,7 +36804,7 @@
                 <a:ea typeface="Alexandria" pitchFamily="34" charset="-122"/>
                 <a:cs typeface="Alexandria" pitchFamily="34" charset="-120"/>
               </a:rPr>
-              <a:t>Các biến cùng khái niệm liên hệ chặt: Cronbach's Alpha</a:t>
+              <a:t>Các biến cùng khái niệm liên hệ chặt: Cronbach's Alpha</a:t>
             </a:r>
             <a:endParaRPr lang="en-US" sz="2600" dirty="0"/>
           </a:p>
@@ -38091,11 +38163,11 @@
         <p:spPr>
           <a:xfrm>
             <a:off x="548640" y="1783080"/>
-            <a:ext cx="3505200" cy="2773680"/>
+            <a:ext cx="3505200" cy="2311400"/>
           </a:xfrm>
           <a:prstGeom prst="roundRect">
             <a:avLst>
-              <a:gd name="adj" fmla="val 5934"/>
+              <a:gd name="adj" fmla="val 7121"/>
             </a:avLst>
           </a:prstGeom>
           <a:solidFill>
@@ -38214,7 +38286,7 @@
         <p:spPr>
           <a:xfrm>
             <a:off x="685800" y="2580640"/>
-            <a:ext cx="3230880" cy="1930400"/>
+            <a:ext cx="3230880" cy="1468120"/>
           </a:xfrm>
           <a:prstGeom prst="rect">
             <a:avLst/>
@@ -38249,18 +38321,18 @@
       </p:sp>
       <p:sp>
         <p:nvSpPr>
-          <p:cNvPr id="11" name="Thẻ Tập trung, lệch"/>
+          <p:cNvPr id="11" name="Thẻ Lệch tâm"/>
           <p:cNvSpPr/>
           <p:nvPr/>
         </p:nvSpPr>
         <p:spPr>
           <a:xfrm>
             <a:off x="4328160" y="1783080"/>
-            <a:ext cx="3505200" cy="2773680"/>
+            <a:ext cx="3505200" cy="2311400"/>
           </a:xfrm>
           <a:prstGeom prst="roundRect">
             <a:avLst>
-              <a:gd name="adj" fmla="val 5934"/>
+              <a:gd name="adj" fmla="val 7121"/>
             </a:avLst>
           </a:prstGeom>
           <a:solidFill>
@@ -38337,7 +38409,7 @@
         <p:spPr>
           <a:xfrm>
             <a:off x="5151120" y="1920240"/>
-            <a:ext cx="2499360" cy="1076960"/>
+            <a:ext cx="2499360" cy="614680"/>
           </a:xfrm>
           <a:prstGeom prst="rect">
             <a:avLst/>
@@ -38364,7 +38436,7 @@
                 <a:ea typeface="Alexandria" pitchFamily="34" charset="-122"/>
                 <a:cs typeface="Alexandria" pitchFamily="34" charset="-120"/>
               </a:rPr>
-              <a:t>Tập trung, lệch</a:t>
+              <a:t>Lệch tâm</a:t>
             </a:r>
             <a:endParaRPr lang="en-US" sz="2800" dirty="0"/>
           </a:p>
@@ -38378,7 +38450,7 @@
         </p:nvSpPr>
         <p:spPr>
           <a:xfrm>
-            <a:off x="4465320" y="3042920"/>
+            <a:off x="4465320" y="2580640"/>
             <a:ext cx="3230880" cy="1468120"/>
           </a:xfrm>
           <a:prstGeom prst="rect">
@@ -38421,11 +38493,11 @@
         <p:spPr>
           <a:xfrm>
             <a:off x="8107680" y="1783080"/>
-            <a:ext cx="3505200" cy="2773680"/>
+            <a:ext cx="3505200" cy="2311400"/>
           </a:xfrm>
           <a:prstGeom prst="roundRect">
             <a:avLst>
-              <a:gd name="adj" fmla="val 5934"/>
+              <a:gd name="adj" fmla="val 7121"/>
             </a:avLst>
           </a:prstGeom>
           <a:solidFill>
@@ -38544,7 +38616,7 @@
         <p:spPr>
           <a:xfrm>
             <a:off x="8244840" y="2580640"/>
-            <a:ext cx="3230880" cy="1930400"/>
+            <a:ext cx="3230880" cy="1468120"/>
           </a:xfrm>
           <a:prstGeom prst="rect">
             <a:avLst/>
@@ -38585,7 +38657,7 @@
         </p:nvSpPr>
         <p:spPr>
           <a:xfrm>
-            <a:off x="548640" y="4922520"/>
+            <a:off x="548640" y="4460240"/>
             <a:ext cx="11064240" cy="685800"/>
           </a:xfrm>
           <a:prstGeom prst="roundRect">
@@ -38607,7 +38679,7 @@
         </p:nvSpPr>
         <p:spPr>
           <a:xfrm>
-            <a:off x="731520" y="5036820"/>
+            <a:off x="731520" y="4574540"/>
             <a:ext cx="457200" cy="457200"/>
           </a:xfrm>
           <a:prstGeom prst="ellipse">
@@ -38627,7 +38699,7 @@
         </p:nvSpPr>
         <p:spPr>
           <a:xfrm>
-            <a:off x="731520" y="5036820"/>
+            <a:off x="731520" y="4574540"/>
             <a:ext cx="457200" cy="457200"/>
           </a:xfrm>
           <a:prstGeom prst="rect">
@@ -38666,7 +38738,7 @@
         </p:nvSpPr>
         <p:spPr>
           <a:xfrm>
-            <a:off x="1325880" y="4922520"/>
+            <a:off x="1325880" y="4460240"/>
             <a:ext cx="10149840" cy="685800"/>
           </a:xfrm>
           <a:prstGeom prst="rect">
@@ -40513,7 +40585,7 @@
                 <a:ea typeface="Alexandria" pitchFamily="34" charset="-122"/>
                 <a:cs typeface="Alexandria" pitchFamily="34" charset="-120"/>
               </a:rPr>
-              <a:t>Muốn biết trà sữa quán A có ngon hơn quán B không, theo 200 sinh viên — bạn hỏi thế nào?</a:t>
+              <a:t>Muốn biết trà sữa quán A có ngon hơn quán B không, theo 200 sinh viên — bạn hỏi thế nào?</a:t>
             </a:r>
             <a:endParaRPr lang="en-US" sz="4000" dirty="0"/>
           </a:p>
@@ -41011,10 +41083,10 @@
             <a:tbl>
               <a:tblPr/>
               <a:tblGrid>
-                <a:gridCol w="2436652"/>
-                <a:gridCol w="3754284"/>
-                <a:gridCol w="2436652"/>
-                <a:gridCol w="2436652"/>
+                <a:gridCol w="2532285"/>
+                <a:gridCol w="3467384"/>
+                <a:gridCol w="2532285"/>
+                <a:gridCol w="2532285"/>
               </a:tblGrid>
               <a:tr h="524256">
                 <a:tc>
@@ -41874,7 +41946,7 @@
                   </a:tcPr>
                 </a:tc>
               </a:tr>
-              <a:tr h="920496">
+              <a:tr h="524256">
                 <a:tc>
                   <a:txBody>
                     <a:bodyPr/>
@@ -41966,7 +42038,7 @@
                           <a:ea typeface="Alexandria" pitchFamily="34" charset="-122"/>
                           <a:cs typeface="Alexandria" pitchFamily="34" charset="-120"/>
                         </a:rPr>
-                        <a:t>Chờ thanh toán quá lâu</a:t>
+                        <a:t>Chờ thanh toán lâu</a:t>
                       </a:r>
                       <a:endParaRPr lang="en-US" sz="2400" dirty="0">
                         <a:latin typeface="Alexandria" charset="0"/>
@@ -42189,7 +42261,7 @@
         </p:nvSpPr>
         <p:spPr>
           <a:xfrm>
-            <a:off x="548640" y="4779264"/>
+            <a:off x="548640" y="4383024"/>
             <a:ext cx="11064240" cy="685800"/>
           </a:xfrm>
           <a:prstGeom prst="roundRect">
@@ -42211,7 +42283,7 @@
         </p:nvSpPr>
         <p:spPr>
           <a:xfrm>
-            <a:off x="731520" y="4893564"/>
+            <a:off x="731520" y="4497324"/>
             <a:ext cx="457200" cy="457200"/>
           </a:xfrm>
           <a:prstGeom prst="ellipse">
@@ -42231,7 +42303,7 @@
         </p:nvSpPr>
         <p:spPr>
           <a:xfrm>
-            <a:off x="731520" y="4893564"/>
+            <a:off x="731520" y="4497324"/>
             <a:ext cx="457200" cy="457200"/>
           </a:xfrm>
           <a:prstGeom prst="rect">
@@ -42270,7 +42342,7 @@
         </p:nvSpPr>
         <p:spPr>
           <a:xfrm>
-            <a:off x="1325880" y="4779264"/>
+            <a:off x="1325880" y="4383024"/>
             <a:ext cx="10149840" cy="685800"/>
           </a:xfrm>
           <a:prstGeom prst="rect">
@@ -44410,7 +44482,7 @@
                 <a:ea typeface="Alexandria" pitchFamily="34" charset="-122"/>
                 <a:cs typeface="Alexandria" pitchFamily="34" charset="-120"/>
               </a:rPr>
-              <a:t>Ý định mua mỹ phẩm nội địa</a:t>
+              <a:t>Ý định mua mỹ phẩm nội địa</a:t>
             </a:r>
             <a:endParaRPr lang="en-US" sz="3200" dirty="0"/>
           </a:p>

--- a/mkt1107/output/MKT1107_W09_slides.pptx
+++ b/mkt1107/output/MKT1107_W09_slides.pptx
@@ -166,25 +166,25 @@
   <p:extLst>
     <p:ext uri="{521415D9-36F7-43E2-AB2F-B90AF26B5E84}">
       <p14:sectionLst xmlns:p14="http://schemas.microsoft.com/office/powerpoint/2010/main">
-        <p14:section name="Mở đầu" id="{0007a40c-2700-b98f-6c44-b3e97a06f4ab}">
+        <p14:section name="Mở đầu" id="{1925b829-0e90-989d-d535-ef8e9d66e152}">
           <p14:sldIdLst>
             <p14:sldId id="256"/>
           </p14:sldIdLst>
         </p14:section>
-        <p14:section name="S1 · Kiểm tra kế hoạch chọn mẫu" id="{6e2fb0ea-0956-9841-92d8-4a6a7b3cbc5c}">
+        <p14:section name="S1 · Kiểm tra kế hoạch chọn mẫu" id="{69f9fcf6-58ec-1b96-68fe-3964f4f9b8ad}">
           <p14:sldIdLst>
             <p14:sldId id="257"/>
             <p14:sldId id="258"/>
           </p14:sldIdLst>
         </p14:section>
-        <p14:section name="S2 · Khởi động: một ly trà sữa ngon bao nhiêu?" id="{dcadc27d-f45c-e69f-19b2-5a5e673a6acd}">
+        <p14:section name="S2 · Khởi động: một ly trà sữa ngon bao nhiêu?" id="{7ef013d9-d9f4-a606-e06a-d7a0850c560e}">
           <p14:sldIdLst>
             <p14:sldId id="259"/>
             <p14:sldId id="260"/>
             <p14:sldId id="261"/>
           </p14:sldIdLst>
         </p14:section>
-        <p14:section name="S3 · 7.1 Đo lường" id="{cdeb7723-23d1-63e9-730f-a0de2ae5494d}">
+        <p14:section name="S3 · 7.1 Đo lường" id="{d1749419-b070-c12f-6842-4560484e83fe}">
           <p14:sldIdLst>
             <p14:sldId id="262"/>
             <p14:sldId id="263"/>
@@ -194,7 +194,7 @@
             <p14:sldId id="267"/>
           </p14:sldIdLst>
         </p14:section>
-        <p14:section name="S4 · 7.2 Các loại thang đo" id="{159bb4ef-f589-5ba3-3008-17d9a77b0f59}">
+        <p14:section name="S4 · 7.2 Các loại thang đo" id="{0a611c41-2241-6316-23d6-4be72a5a577b}">
           <p14:sldIdLst>
             <p14:sldId id="268"/>
             <p14:sldId id="269"/>
@@ -210,7 +210,7 @@
             <p14:sldId id="279"/>
           </p14:sldIdLst>
         </p14:section>
-        <p14:section name="S5 · 7.3 Cấp thang đo và độ mạnh của chúng" id="{7baa507b-49ce-3e4a-69ad-8b7cbf63030a}">
+        <p14:section name="S5 · 7.3 Cấp thang đo và độ mạnh của chúng" id="{35261b40-8e16-e9b4-ba38-a593cbd4e566}">
           <p14:sldIdLst>
             <p14:sldId id="280"/>
             <p14:sldId id="281"/>
@@ -219,7 +219,7 @@
             <p14:sldId id="284"/>
           </p14:sldIdLst>
         </p14:section>
-        <p14:section name="S6 · Đố cấp thang đo" id="{086f40c8-6e9b-802c-e641-0cd52bbc49b2}">
+        <p14:section name="S6 · Đố cấp thang đo" id="{ebda1b86-bed2-3d17-0083-234d3d8f6f24}">
           <p14:sldIdLst>
             <p14:sldId id="285"/>
             <p14:sldId id="286"/>
@@ -233,7 +233,7 @@
             <p14:sldId id="294"/>
           </p14:sldIdLst>
         </p14:section>
-        <p14:section name="S7 · 7.4 Đánh giá đo lường" id="{b54f5986-7d49-c497-58ff-f9bfad9f494d}">
+        <p14:section name="S7 · 7.4 Đánh giá đo lường" id="{a1579a1a-b2ad-3bb5-3bb7-13dcc9cfc61a}">
           <p14:sldIdLst>
             <p14:sldId id="295"/>
             <p14:sldId id="296"/>
@@ -247,7 +247,7 @@
             <p14:sldId id="304"/>
           </p14:sldIdLst>
         </p14:section>
-        <p14:section name="S8 · Đảo mã, các loại biến và mô hình nghiên cứu" id="{6f07ed84-5a00-7201-bf6b-804e12c0371b}">
+        <p14:section name="S8 · Đảo mã, các loại biến và mô hình nghiên cứu" id="{0f68f432-a492-7c51-3630-50c55aa492d9}">
           <p14:sldIdLst>
             <p14:sldId id="305"/>
             <p14:sldId id="306"/>
@@ -255,13 +255,13 @@
             <p14:sldId id="308"/>
           </p14:sldIdLst>
         </p14:section>
-        <p14:section name="S9 · Thực hành nhóm: Xưởng thang đo" id="{500c3982-9983-2d17-bda4-89de95965445}">
+        <p14:section name="S9 · Thực hành nhóm: Xưởng thang đo" id="{4c1ca45d-43ca-4d25-b3e0-14ece7df4372}">
           <p14:sldIdLst>
             <p14:sldId id="309"/>
             <p14:sldId id="310"/>
           </p14:sldIdLst>
         </p14:section>
-        <p14:section name="S10 · Kết buổi" id="{4270333c-1b33-314e-2a5e-cb9ed5fdc499}">
+        <p14:section name="S10 · Kết buổi" id="{0b32f2ca-672b-e2f7-0e49-5bad38bdf369}">
           <p14:sldIdLst>
             <p14:sldId id="311"/>
             <p14:sldId id="312"/>
@@ -7327,9 +7327,9 @@
             <a:tbl>
               <a:tblPr/>
               <a:tblGrid>
-                <a:gridCol w="3224657"/>
-                <a:gridCol w="4501196"/>
-                <a:gridCol w="3338387"/>
+                <a:gridCol w="3303379"/>
+                <a:gridCol w="4455997"/>
+                <a:gridCol w="3304864"/>
               </a:tblGrid>
               <a:tr h="524256">
                 <a:tc>
@@ -19289,10 +19289,10 @@
             <a:tbl>
               <a:tblPr/>
               <a:tblGrid>
-                <a:gridCol w="2285828"/>
-                <a:gridCol w="2285828"/>
-                <a:gridCol w="2285828"/>
-                <a:gridCol w="4206757"/>
+                <a:gridCol w="2731999"/>
+                <a:gridCol w="2731999"/>
+                <a:gridCol w="2731999"/>
+                <a:gridCol w="2868243"/>
               </a:tblGrid>
               <a:tr h="524256">
                 <a:tc>
@@ -28440,10 +28440,10 @@
             <a:tbl>
               <a:tblPr/>
               <a:tblGrid>
-                <a:gridCol w="2278962"/>
-                <a:gridCol w="2540093"/>
-                <a:gridCol w="3966224"/>
-                <a:gridCol w="2278962"/>
+                <a:gridCol w="2731999"/>
+                <a:gridCol w="2731999"/>
+                <a:gridCol w="2868243"/>
+                <a:gridCol w="2731999"/>
               </a:tblGrid>
               <a:tr h="524256">
                 <a:tc>
@@ -30247,9 +30247,9 @@
             <a:tbl>
               <a:tblPr/>
               <a:tblGrid>
-                <a:gridCol w="3460936"/>
-                <a:gridCol w="3459094"/>
-                <a:gridCol w="4144209"/>
+                <a:gridCol w="3488427"/>
+                <a:gridCol w="3446588"/>
+                <a:gridCol w="4129226"/>
               </a:tblGrid>
               <a:tr h="524256">
                 <a:tc>
@@ -37130,8 +37130,8 @@
             <a:tbl>
               <a:tblPr/>
               <a:tblGrid>
-                <a:gridCol w="4217482"/>
-                <a:gridCol w="6846758"/>
+                <a:gridCol w="4264627"/>
+                <a:gridCol w="6799613"/>
               </a:tblGrid>
               <a:tr h="524256">
                 <a:tc>
@@ -47616,102 +47616,6 @@
       </p:sp>
       <p:sp>
         <p:nvSpPr>
-          <p:cNvPr id="10" name="Dấu đầu dòng"/>
-          <p:cNvSpPr/>
-          <p:nvPr/>
-        </p:nvSpPr>
-        <p:spPr>
-          <a:xfrm>
-            <a:off x="585216" y="5199888"/>
-            <a:ext cx="164592" cy="164592"/>
-          </a:xfrm>
-          <a:prstGeom prst="ellipse">
-            <a:avLst/>
-          </a:prstGeom>
-          <a:solidFill>
-            <a:srgbClr val="FF5178"/>
-          </a:solidFill>
-          <a:ln/>
-        </p:spPr>
-      </p:sp>
-      <p:sp>
-        <p:nvSpPr>
-          <p:cNvPr id="11" name="Text 9"/>
-          <p:cNvSpPr txBox="1"/>
-          <p:nvPr/>
-        </p:nvSpPr>
-        <p:spPr>
-          <a:xfrm>
-            <a:off x="914400" y="5007864"/>
-            <a:ext cx="10607040" cy="944880"/>
-          </a:xfrm>
-          <a:prstGeom prst="rect">
-            <a:avLst/>
-          </a:prstGeom>
-          <a:noFill/>
-          <a:ln/>
-        </p:spPr>
-        <p:txBody>
-          <a:bodyPr wrap="square" lIns="76200" tIns="76200" rIns="76200" bIns="76200" rtlCol="0" anchor="t"/>
-          <a:lstStyle/>
-          <a:p>
-            <a:pPr algn="l" indent="0" marL="0">
-              <a:lnSpc>
-                <a:spcPts val="3100"/>
-              </a:lnSpc>
-              <a:buNone/>
-            </a:pPr>
-            <a:r>
-              <a:rPr lang="en-US" sz="2400" dirty="0">
-                <a:solidFill>
-                  <a:srgbClr val="2E2A3A"/>
-                </a:solidFill>
-                <a:latin typeface="Alexandria" pitchFamily="34" charset="0"/>
-                <a:ea typeface="Alexandria" pitchFamily="34" charset="-122"/>
-                <a:cs typeface="Alexandria" pitchFamily="34" charset="-120"/>
-              </a:rPr>
-              <a:t>Hair, J. F., Black, W. C., Babin, B. J., &amp; Anderson, R. E. (2019). </a:t>
-            </a:r>
-            <a:pPr algn="l" indent="0" marL="0">
-              <a:lnSpc>
-                <a:spcPts val="3100"/>
-              </a:lnSpc>
-              <a:buNone/>
-            </a:pPr>
-            <a:r>
-              <a:rPr lang="en-US" sz="2400" i="1" dirty="0">
-                <a:solidFill>
-                  <a:srgbClr val="2E2A3A"/>
-                </a:solidFill>
-                <a:latin typeface="Alexandria" pitchFamily="34" charset="0"/>
-                <a:ea typeface="Alexandria" pitchFamily="34" charset="-122"/>
-                <a:cs typeface="Alexandria" pitchFamily="34" charset="-120"/>
-              </a:rPr>
-              <a:t>Multivariate data analysis</a:t>
-            </a:r>
-            <a:pPr algn="l" indent="0" marL="0">
-              <a:lnSpc>
-                <a:spcPts val="3100"/>
-              </a:lnSpc>
-              <a:buNone/>
-            </a:pPr>
-            <a:r>
-              <a:rPr lang="en-US" sz="2400" dirty="0">
-                <a:solidFill>
-                  <a:srgbClr val="2E2A3A"/>
-                </a:solidFill>
-                <a:latin typeface="Alexandria" pitchFamily="34" charset="0"/>
-                <a:ea typeface="Alexandria" pitchFamily="34" charset="-122"/>
-                <a:cs typeface="Alexandria" pitchFamily="34" charset="-120"/>
-              </a:rPr>
-              <a:t> (8th ed.). Cengage Learning.</a:t>
-            </a:r>
-            <a:endParaRPr lang="en-US" sz="2400" dirty="0"/>
-          </a:p>
-        </p:txBody>
-      </p:sp>
-      <p:sp>
-        <p:nvSpPr>
           <p:cNvPr id="25" name="Slide Number Placeholder 0"/>
           <p:cNvSpPr>
             <a:spLocks noGrp="1"/>
@@ -48846,7 +48750,7 @@
                 <a:ea typeface="Alexandria" pitchFamily="34" charset="-122"/>
                 <a:cs typeface="Alexandria" pitchFamily="34" charset="-120"/>
               </a:rPr>
-              <a:t>Malhotra, N. K. (2019). </a:t>
+              <a:t>Hair, J. F., Black, W. C., Babin, B. J., &amp; Anderson, R. E. (2019). </a:t>
             </a:r>
             <a:pPr algn="l" indent="0" marL="0">
               <a:lnSpc>
@@ -48863,7 +48767,7 @@
                 <a:ea typeface="Alexandria" pitchFamily="34" charset="-122"/>
                 <a:cs typeface="Alexandria" pitchFamily="34" charset="-120"/>
               </a:rPr>
-              <a:t>Marketing research: An applied orientation</a:t>
+              <a:t>Multivariate data analysis</a:t>
             </a:r>
             <a:pPr algn="l" indent="0" marL="0">
               <a:lnSpc>
@@ -48880,7 +48784,7 @@
                 <a:ea typeface="Alexandria" pitchFamily="34" charset="-122"/>
                 <a:cs typeface="Alexandria" pitchFamily="34" charset="-120"/>
               </a:rPr>
-              <a:t> (7th ed.). Pearson.</a:t>
+              <a:t> (8th ed.). Cengage Learning.</a:t>
             </a:r>
             <a:endParaRPr lang="en-US" sz="2400" dirty="0"/>
           </a:p>
@@ -48942,7 +48846,7 @@
                 <a:ea typeface="Alexandria" pitchFamily="34" charset="-122"/>
                 <a:cs typeface="Alexandria" pitchFamily="34" charset="-120"/>
               </a:rPr>
-              <a:t>Nguyễn, Đ. T. (2011). </a:t>
+              <a:t>Malhotra, N. K. (2019). </a:t>
             </a:r>
             <a:pPr algn="l" indent="0" marL="0">
               <a:lnSpc>
@@ -48959,7 +48863,7 @@
                 <a:ea typeface="Alexandria" pitchFamily="34" charset="-122"/>
                 <a:cs typeface="Alexandria" pitchFamily="34" charset="-120"/>
               </a:rPr>
-              <a:t>Phương pháp nghiên cứu khoa học trong kinh doanh</a:t>
+              <a:t>Marketing research: An applied orientation</a:t>
             </a:r>
             <a:pPr algn="l" indent="0" marL="0">
               <a:lnSpc>
@@ -48976,7 +48880,7 @@
                 <a:ea typeface="Alexandria" pitchFamily="34" charset="-122"/>
                 <a:cs typeface="Alexandria" pitchFamily="34" charset="-120"/>
               </a:rPr>
-              <a:t>. NXB Lao động – Xã hội.</a:t>
+              <a:t> (7th ed.). Pearson.</a:t>
             </a:r>
             <a:endParaRPr lang="en-US" sz="2400" dirty="0"/>
           </a:p>
@@ -49011,6 +48915,102 @@
         <p:spPr>
           <a:xfrm>
             <a:off x="914400" y="3819144"/>
+            <a:ext cx="10607040" cy="944880"/>
+          </a:xfrm>
+          <a:prstGeom prst="rect">
+            <a:avLst/>
+          </a:prstGeom>
+          <a:noFill/>
+          <a:ln/>
+        </p:spPr>
+        <p:txBody>
+          <a:bodyPr wrap="square" lIns="76200" tIns="76200" rIns="76200" bIns="76200" rtlCol="0" anchor="t"/>
+          <a:lstStyle/>
+          <a:p>
+            <a:pPr algn="l" indent="0" marL="0">
+              <a:lnSpc>
+                <a:spcPts val="3100"/>
+              </a:lnSpc>
+              <a:buNone/>
+            </a:pPr>
+            <a:r>
+              <a:rPr lang="en-US" sz="2400" dirty="0">
+                <a:solidFill>
+                  <a:srgbClr val="2E2A3A"/>
+                </a:solidFill>
+                <a:latin typeface="Alexandria" pitchFamily="34" charset="0"/>
+                <a:ea typeface="Alexandria" pitchFamily="34" charset="-122"/>
+                <a:cs typeface="Alexandria" pitchFamily="34" charset="-120"/>
+              </a:rPr>
+              <a:t>Nguyễn, Đ. T. (2011). </a:t>
+            </a:r>
+            <a:pPr algn="l" indent="0" marL="0">
+              <a:lnSpc>
+                <a:spcPts val="3100"/>
+              </a:lnSpc>
+              <a:buNone/>
+            </a:pPr>
+            <a:r>
+              <a:rPr lang="en-US" sz="2400" i="1" dirty="0">
+                <a:solidFill>
+                  <a:srgbClr val="2E2A3A"/>
+                </a:solidFill>
+                <a:latin typeface="Alexandria" pitchFamily="34" charset="0"/>
+                <a:ea typeface="Alexandria" pitchFamily="34" charset="-122"/>
+                <a:cs typeface="Alexandria" pitchFamily="34" charset="-120"/>
+              </a:rPr>
+              <a:t>Phương pháp nghiên cứu khoa học trong kinh doanh</a:t>
+            </a:r>
+            <a:pPr algn="l" indent="0" marL="0">
+              <a:lnSpc>
+                <a:spcPts val="3100"/>
+              </a:lnSpc>
+              <a:buNone/>
+            </a:pPr>
+            <a:r>
+              <a:rPr lang="en-US" sz="2400" dirty="0">
+                <a:solidFill>
+                  <a:srgbClr val="2E2A3A"/>
+                </a:solidFill>
+                <a:latin typeface="Alexandria" pitchFamily="34" charset="0"/>
+                <a:ea typeface="Alexandria" pitchFamily="34" charset="-122"/>
+                <a:cs typeface="Alexandria" pitchFamily="34" charset="-120"/>
+              </a:rPr>
+              <a:t>. NXB Lao động – Xã hội.</a:t>
+            </a:r>
+            <a:endParaRPr lang="en-US" sz="2400" dirty="0"/>
+          </a:p>
+        </p:txBody>
+      </p:sp>
+      <p:sp>
+        <p:nvSpPr>
+          <p:cNvPr id="12" name="Dấu đầu dòng"/>
+          <p:cNvSpPr/>
+          <p:nvPr/>
+        </p:nvSpPr>
+        <p:spPr>
+          <a:xfrm>
+            <a:off x="585216" y="5029200"/>
+            <a:ext cx="164592" cy="164592"/>
+          </a:xfrm>
+          <a:prstGeom prst="ellipse">
+            <a:avLst/>
+          </a:prstGeom>
+          <a:solidFill>
+            <a:srgbClr val="FF9259"/>
+          </a:solidFill>
+          <a:ln/>
+        </p:spPr>
+      </p:sp>
+      <p:sp>
+        <p:nvSpPr>
+          <p:cNvPr id="13" name="Text 11"/>
+          <p:cNvSpPr txBox="1"/>
+          <p:nvPr/>
+        </p:nvSpPr>
+        <p:spPr>
+          <a:xfrm>
+            <a:off x="914400" y="4837176"/>
             <a:ext cx="10607040" cy="944880"/>
           </a:xfrm>
           <a:prstGeom prst="rect">

--- a/mkt1107/output/MKT1107_W09_slides.pptx
+++ b/mkt1107/output/MKT1107_W09_slides.pptx
@@ -166,25 +166,25 @@
   <p:extLst>
     <p:ext uri="{521415D9-36F7-43E2-AB2F-B90AF26B5E84}">
       <p14:sectionLst xmlns:p14="http://schemas.microsoft.com/office/powerpoint/2010/main">
-        <p14:section name="Mở đầu" id="{1925b829-0e90-989d-d535-ef8e9d66e152}">
+        <p14:section name="Mở đầu" id="{ae7847f5-0729-9743-a08d-f324477bb3cb}">
           <p14:sldIdLst>
             <p14:sldId id="256"/>
           </p14:sldIdLst>
         </p14:section>
-        <p14:section name="S1 · Kiểm tra kế hoạch chọn mẫu" id="{69f9fcf6-58ec-1b96-68fe-3964f4f9b8ad}">
+        <p14:section name="S1 · Kiểm tra kế hoạch chọn mẫu" id="{6c4727c2-60e6-6d13-879a-6629cbf784bc}">
           <p14:sldIdLst>
             <p14:sldId id="257"/>
             <p14:sldId id="258"/>
           </p14:sldIdLst>
         </p14:section>
-        <p14:section name="S2 · Khởi động: một ly trà sữa ngon bao nhiêu?" id="{7ef013d9-d9f4-a606-e06a-d7a0850c560e}">
+        <p14:section name="S2 · Khởi động: một ly trà sữa ngon bao nhiêu?" id="{856f5532-9b8e-ddb2-980a-09c7a68e2929}">
           <p14:sldIdLst>
             <p14:sldId id="259"/>
             <p14:sldId id="260"/>
             <p14:sldId id="261"/>
           </p14:sldIdLst>
         </p14:section>
-        <p14:section name="S3 · 7.1 Đo lường" id="{d1749419-b070-c12f-6842-4560484e83fe}">
+        <p14:section name="S3 · 7.1 Đo lường" id="{4a8eb3d2-8f3c-5b60-33a5-25228c309fba}">
           <p14:sldIdLst>
             <p14:sldId id="262"/>
             <p14:sldId id="263"/>
@@ -194,7 +194,7 @@
             <p14:sldId id="267"/>
           </p14:sldIdLst>
         </p14:section>
-        <p14:section name="S4 · 7.2 Các loại thang đo" id="{0a611c41-2241-6316-23d6-4be72a5a577b}">
+        <p14:section name="S4 · 7.2 Các loại thang đo" id="{9d81e972-6eef-8019-f465-e5aa7902fc95}">
           <p14:sldIdLst>
             <p14:sldId id="268"/>
             <p14:sldId id="269"/>
@@ -210,7 +210,7 @@
             <p14:sldId id="279"/>
           </p14:sldIdLst>
         </p14:section>
-        <p14:section name="S5 · 7.3 Cấp thang đo và độ mạnh của chúng" id="{35261b40-8e16-e9b4-ba38-a593cbd4e566}">
+        <p14:section name="S5 · 7.3 Cấp thang đo và độ mạnh của chúng" id="{19742d09-54f7-334d-6e69-c71abb5239b2}">
           <p14:sldIdLst>
             <p14:sldId id="280"/>
             <p14:sldId id="281"/>
@@ -219,7 +219,7 @@
             <p14:sldId id="284"/>
           </p14:sldIdLst>
         </p14:section>
-        <p14:section name="S6 · Đố cấp thang đo" id="{ebda1b86-bed2-3d17-0083-234d3d8f6f24}">
+        <p14:section name="S6 · Đố cấp thang đo" id="{0ac91b0c-2aff-b6e1-e048-83fed902390e}">
           <p14:sldIdLst>
             <p14:sldId id="285"/>
             <p14:sldId id="286"/>
@@ -233,7 +233,7 @@
             <p14:sldId id="294"/>
           </p14:sldIdLst>
         </p14:section>
-        <p14:section name="S7 · 7.4 Đánh giá đo lường" id="{a1579a1a-b2ad-3bb5-3bb7-13dcc9cfc61a}">
+        <p14:section name="S7 · 7.4 Đánh giá đo lường" id="{b1484fa4-a14a-abfb-51d1-a735f467ef9f}">
           <p14:sldIdLst>
             <p14:sldId id="295"/>
             <p14:sldId id="296"/>
@@ -247,7 +247,7 @@
             <p14:sldId id="304"/>
           </p14:sldIdLst>
         </p14:section>
-        <p14:section name="S8 · Đảo mã, các loại biến và mô hình nghiên cứu" id="{0f68f432-a492-7c51-3630-50c55aa492d9}">
+        <p14:section name="S8 · Đảo mã, các loại biến và mô hình nghiên cứu" id="{558f8fc3-78bb-71b4-09f3-8cfeb05754e5}">
           <p14:sldIdLst>
             <p14:sldId id="305"/>
             <p14:sldId id="306"/>
@@ -255,13 +255,13 @@
             <p14:sldId id="308"/>
           </p14:sldIdLst>
         </p14:section>
-        <p14:section name="S9 · Thực hành nhóm: Xưởng thang đo" id="{4c1ca45d-43ca-4d25-b3e0-14ece7df4372}">
+        <p14:section name="S9 · Thực hành nhóm: Xưởng thang đo" id="{93f0418b-fa72-6112-776e-0b4b3db06f89}">
           <p14:sldIdLst>
             <p14:sldId id="309"/>
             <p14:sldId id="310"/>
           </p14:sldIdLst>
         </p14:section>
-        <p14:section name="S10 · Kết buổi" id="{0b32f2ca-672b-e2f7-0e49-5bad38bdf369}">
+        <p14:section name="S10 · Kết buổi" id="{f16908ab-92dd-e8f9-43f9-ca86dd019974}">
           <p14:sldIdLst>
             <p14:sldId id="311"/>
             <p14:sldId id="312"/>
@@ -1041,7 +1041,8 @@
           <a:p>
             <a:r>
               <a:rPr lang="en-US" dirty="0"/>
-              <a:t>Phân đoạn dài nhất phần lý thuyết — 18 phút cho bốn cấp thang đo và ba thang thái độ. Đây là phân đoạn dày slide (khoảng 11 slide), nên giữ nhịp: mỗi slide ví dụ chỉ 1–1,5 phút.
+              <a:t>Thời gian: phút 20–38 của buổi học.
+Phân đoạn dài nhất phần lý thuyết — 18 phút cho bốn cấp thang đo và ba thang thái độ. Đây là phân đoạn dày slide (khoảng 11 slide), nên giữ nhịp: mỗi slide ví dụ chỉ 1–1,5 phút.
 Nếu đang chậm giờ: gộp slide so sánh cặp vào slide thang thứ tự, chiếu nhanh Stapel và slide hỏi tuổi bằng khoảng. Không cắt slide Likert là quy ước và slide thang tỷ lệ vì sinh viên sẽ cần chúng khi viết chương phương pháp.</a:t>
             </a:r>
             <a:endParaRPr lang="en-US" dirty="0"/>
@@ -1680,7 +1681,8 @@
           <a:p>
             <a:r>
               <a:rPr lang="en-US" dirty="0"/>
-              <a:t>Phân đoạn mở đầu 7 phút: kiểm tra nhanh bài tập Buổi 8 — kế hoạch chọn mẫu của các nhóm. Mục tiêu là để các nhóm tự phát hiện lỗ hổng trước khi đưa vào bài giữa kỳ, không phải chấm điểm.
+              <a:t>Thời gian: phút 0–7 của buổi học.
+Phân đoạn mở đầu 7 phút: kiểm tra nhanh bài tập Buổi 8 — kế hoạch chọn mẫu của các nhóm. Mục tiêu là để các nhóm tự phát hiện lỗ hổng trước khi đưa vào bài giữa kỳ, không phải chấm điểm.
 Cách làm: chiếu checklist năm câu ở slide sau, mời trước hai nhóm — một nhóm định lượng, một nhóm định tính — đọc phần chọn mẫu, mỗi nhóm tối đa 1 phút. Các nhóm còn lại tự đánh dấu checklist trên bản của mình trong lúc nghe.
 Giữ đúng giờ: mỗi nhóm chỉ nhận đúng một câu phản hồi từ giảng viên, ưu tiên lỗi điển hình mà cả lớp cùng học được. Nếu lớp muốn hỏi thêm, hẹn trao đổi trong giờ thực hành cuối buổi.</a:t>
             </a:r>
@@ -2230,7 +2232,8 @@
           <a:p>
             <a:r>
               <a:rPr lang="en-US" dirty="0"/>
-              <a:t>Phân đoạn 7 phút: bảng phép tính và thống kê được phép theo từng cấp, ba phát biểu không hợp lệ, và hệ quả cho thiết kế bảng hỏi.
+              <a:t>Thời gian: phút 38–45 của buổi học.
+Phân đoạn 7 phút: bảng phép tính và thống kê được phép theo từng cấp, ba phát biểu không hợp lệ, và hệ quả cho thiết kế bảng hỏi.
 Đây là phần sinh viên cần nhất khi viết Chương 4 — cho lớp chụp lại bảng bốn cấp. Ngay sau phân đoạn này là hoạt động đố cấp thang đo, nên phần giảng cần gọn để còn đủ 7 phút cho hoạt động trước giải lao.
 Trước khi chuyển sang slide đầu tiên của phân đoạn, nói một câu nối với phần vừa học để lớp thấy mạch bài, và nhắc lớp giữ đề tài của nhóm mình trong đầu khi nghe ví dụ.</a:t>
             </a:r>
@@ -2779,7 +2782,8 @@
           <a:p>
             <a:r>
               <a:rPr lang="en-US" dirty="0"/>
-              <a:t>Hoạt động 7 phút theo kiểu Think-Pair-Share rút gọn: làm theo cặp với bạn ngồi cạnh, trả lời bằng cách giơ ngón tay thay cho công cụ bình chọn.
+              <a:t>Thời gian: phút 45–52 của buổi học.
+Hoạt động 7 phút theo kiểu Think-Pair-Share rút gọn: làm theo cặp với bạn ngồi cạnh, trả lời bằng cách giơ ngón tay thay cho công cụ bình chọn.
 Mốc thời gian: phút 45 đọc kịch bản mở đầu và chiếu câu 1; phút 45–50 câu 1–4 (đọc → 20 giây → 3–2–1 giơ tay → nói đáp án → giơ tay (a)/(b) → giải thích một câu); phút 50–51 câu 5–8 đọc nhanh; phút 51–52 chữa câu lớp chia rẽ nhiều nhất (thường là câu 3 hoặc 6).
 Lưu ý cho giảng viên: kịch bản đầy đủ trong phiếu hoạt động “Đố cấp thang đo” của Buổi 9.</a:t>
             </a:r>
@@ -2869,7 +2873,8 @@
           <a:p>
             <a:r>
               <a:rPr lang="en-US" dirty="0"/>
-              <a:t>Đọc kịch bản mở đầu: “Mình kiểm tra ngay bảng vừa học. Tôi chiếu 8 câu hỏi khảo sát. Mỗi câu, các bạn có 20 giây bàn với bạn bên cạnh, rồi khi tôi đếm 3–2–1 thì giơ tay: 1 ngón là định danh, 2 ngón là thứ tự, 3 ngón là quãng, 4 ngón là tỷ lệ. Bốn câu đầu tôi hỏi thêm: phát biểu (a) hay (b) mới hợp lệ — giơ 1 ngón cho (a), 2 ngón cho (b). Cả lớp giơ cùng lúc, không nhìn bạn khác.”
+              <a:t>Thời gian: mỗi câu 20 giây bàn với bạn.
+Đọc kịch bản mở đầu: “Mình kiểm tra ngay bảng vừa học. Tôi chiếu 8 câu hỏi khảo sát. Mỗi câu, các bạn có 20 giây bàn với bạn bên cạnh, rồi khi tôi đếm 3–2–1 thì giơ tay: 1 ngón là định danh, 2 ngón là thứ tự, 3 ngón là quãng, 4 ngón là tỷ lệ. Bốn câu đầu tôi hỏi thêm: phát biểu (a) hay (b) mới hợp lệ — giơ 1 ngón cho (a), 2 ngón cho (b). Cả lớp giơ cùng lúc, không nhìn bạn khác.”
 Nếu ít bạn giơ tay: nhắc “giơ cùng lúc, sai cũng không sao — đây là luyện tập”; giảng viên tự giơ tay đếm 3–2–1 làm mẫu. Ai không muốn giơ tay có thể ghi đáp án ra giấy — không chấm điểm.
 Nếu lớp chia rẽ ở hầu hết các câu: dừng sau câu 3, quay lại bảng bốn cấp, rồi làm tiếp. Nếu chạy quá giờ: chỉ làm câu 1–4; câu 5–8 chuyển thành câu tự kiểm tra.</a:t>
             </a:r>
@@ -3323,7 +3328,8 @@
           <a:p>
             <a:r>
               <a:rPr lang="en-US" dirty="0"/>
-              <a:t>Bốn câu này đi nhanh, mỗi câu khoảng 20 giây: đọc, đếm 3–2–1, cả lớp giơ tay cấp thang đo, giảng viên nói đáp án một câu.
+              <a:t>Thời gian: 20 giây.
+Bốn câu này đi nhanh, mỗi câu khoảng 20 giây: đọc, đếm 3–2–1, cả lớp giơ tay cấp thang đo, giảng viên nói đáp án một câu.
 Câu 5 — mã số sinh viên: định danh (1 ngón); là số nhưng chỉ là nhãn.
 Câu 6 — thu nhập hằng tháng theo ba khoảng: thứ tự (2 ngón). Đây là bẫy chính: nhiều bạn chọn 4 vì “là tiền” — nhưng đã gom thành khoảng nên mất điểm 0 và khoảng cách đều. Nối với mẹo “đừng tự hạ cấp thang đo”: nếu nhóm cần thu nhập trung bình thì phải hỏi số cụ thể, và cân nhắc tính nhạy cảm — Buổi 10.
 Câu 7 — nhiệt độ °C: quãng (3 ngón); 0°C không phải “không có nhiệt độ”.
@@ -3598,7 +3604,8 @@
           <a:p>
             <a:r>
               <a:rPr lang="en-US" dirty="0"/>
-              <a:t>Giải lao 15 phút (phút 52–67). Điền giờ quay lại cụ thể trước khi chiếu.
+              <a:t>Thời gian: giải lao 15 phút.
+Giải lao 15 phút (phút 52–67). Điền giờ quay lại cụ thể trước khi chiếu.
 Câu nối trước khi nghỉ: “Sau giải lao: vì sao con số đo được không bao giờ đúng hoàn toàn — và nhóm làm gì để nó gần đúng nhất.”
 Trong giờ nghỉ, giảng viên có thể đi một vòng hỏi nhanh các nhóm đã mở sẵn đề cương M4 và tổng quan M3 chưa, để phần thực hành sau không mất thời gian khởi động.
 Lưu ý cho giảng viên: điền giờ quay lại vào dấu “…” trên slide.</a:t>
@@ -3689,7 +3696,8 @@
           <a:p>
             <a:r>
               <a:rPr lang="en-US" dirty="0"/>
-              <a:t>Phân đoạn khởi động 3 phút. Mục đích: để lớp tự nhận ra rằng mình đã quen “gán số” cho những thứ trừu tượng mà không gọi tên nó là đo lường.
+              <a:t>Thời gian: phút 7–10 của buổi học.
+Phân đoạn khởi động 3 phút. Mục đích: để lớp tự nhận ra rằng mình đã quen “gán số” cho những thứ trừu tượng mà không gọi tên nó là đo lường.
 Chiếu câu hỏi ở slide sau và không giải thích gì thêm. Để lớp trả lời tự do, giảng viên chỉ ghi lên bảng. Phần này chỉ 3 phút, nên dừng lại ngay khi đã có 3–4 cách khác nhau trên bảng.
 Trước khi chuyển sang slide đầu tiên của phân đoạn, nói một câu nối với phần vừa học để lớp thấy mạch bài, và nhắc lớp giữ đề tài của nhóm mình trong đầu khi nghe ví dụ.</a:t>
             </a:r>
@@ -3779,7 +3787,8 @@
           <a:p>
             <a:r>
               <a:rPr lang="en-US" dirty="0"/>
-              <a:t>Phân đoạn 18 phút: sai lệch trong đo lường (khoảng 7 phút), độ tin cậy và giá trị (khoảng 7 phút), Cronbach's Alpha (khoảng 2 phút), cách để có thang đo tốt (khoảng 2 phút).
+              <a:t>Thời gian: phút 67–85 của buổi học.
+Phân đoạn 18 phút: sai lệch trong đo lường (khoảng 7 phút), độ tin cậy và giá trị (khoảng 7 phút), Cronbach's Alpha (khoảng 2 phút), cách để có thang đo tốt (khoảng 2 phút).
 Đây là toàn bộ slide soạn mới. Nếu chạy chậm: bỏ slide ví dụ đổi con số trên thang, giữ định nghĩa hai loại sai lệch và hình ảnh bắn bia.
 Mở đầu lại sau giải lao bằng câu hỏi: “Có phép đo nào hoàn hảo không?”</a:t>
             </a:r>
@@ -4781,7 +4790,8 @@
           <a:p>
             <a:r>
               <a:rPr lang="en-US" dirty="0"/>
-              <a:t>Phân đoạn 8 phút, ba nội dung ngắn: đảo mã câu ngược chiều (khoảng 3 phút), bốn vai của biến (khoảng 3 phút), mô hình nghiên cứu (khoảng 2 phút).
+              <a:t>Thời gian: phút 85–93 của buổi học.
+Phân đoạn 8 phút, ba nội dung ngắn: đảo mã câu ngược chiều (khoảng 3 phút), bốn vai của biến (khoảng 3 phút), mô hình nghiên cứu (khoảng 2 phút).
 Đây là cầu nối sang phần thực hành: sau phân đoạn này, các nhóm vẽ mô hình của chính mình. Nếu chạy chậm: biến trung gian và điều tiết chỉ nêu một câu và chỉ sang tài liệu đọc thêm.
 Lưu ý cho giảng viên: tài liệu học tập Bài 7 chưa có mục đảo mã và biến trung gian/điều tiết — bài giảng bổ sung ở mức giới thiệu.</a:t>
             </a:r>
@@ -5146,7 +5156,8 @@
           <a:p>
             <a:r>
               <a:rPr lang="en-US" dirty="0"/>
-              <a:t>Phân đoạn thực hành 45 phút — không cắt phân đoạn này dù chạy chậm giờ ở phần trước.
+              <a:t>Thời gian: phút 93–138 của buổi học.
+Phân đoạn thực hành 45 phút — không cắt phân đoạn này dù chạy chậm giờ ở phần trước.
 Kỹ thuật: làm việc nhóm theo sản phẩm dự án, đánh giá đồng đẳng theo checklist và chia sẻ ngắn. Sinh viên cần máy tính, đề cương nhóm (M4), tổng quan tài liệu (M3), các bài báo đã thu thập và phiếu nhóm (bản in hoặc điện tử).
 Lưu ý cho giảng viên: kịch bản, phiếu nhóm định lượng/định tính và checklist nằm trong phiếu hoạt động “Xưởng thang đo” của Buổi 9.</a:t>
             </a:r>
@@ -5236,7 +5247,9 @@
           <a:p>
             <a:r>
               <a:rPr lang="en-US" dirty="0"/>
-              <a:t>Kịch bản mở đầu: “45 phút tới là xưởng thang đo cho đề tài của chính các bạn. Việc đầu tiên: mở đề cương M4 và bản tổng quan M3 — mọi khái niệm phải đến từ đó, không nghĩ thêm. Nhóm định lượng tìm thang đo trong chính các bài báo đã đọc trước khi tìm cái mới. Nếu dùng AI để gợi ý, nhớ: AI rất hay bịa nguồn hoặc viết lại biến quan sát — mở bài gốc ra đối chiếu.”
+              <a:t>Thời gian: 45 phút.
+Phân bổ thời gian — chặng 1: 5 phút; chặng 2: 20 phút; chặng 3: 10 phút; chặng 4: 10 phút.
+Kịch bản mở đầu: “45 phút tới là xưởng thang đo cho đề tài của chính các bạn. Việc đầu tiên: mở đề cương M4 và bản tổng quan M3 — mọi khái niệm phải đến từ đó, không nghĩ thêm. Nhóm định lượng tìm thang đo trong chính các bài báo đã đọc trước khi tìm cái mới. Nếu dùng AI để gợi ý, nhớ: AI rất hay bịa nguồn hoặc viết lại biến quan sát — mở bài gốc ra đối chiếu.”
 Mốc: 93–98 chặng 1, đi nhanh các bàn kiểm tra đã xác định biến phụ thuộc (ĐL) / câu hỏi nghiên cứu (ĐT). 98–118 chặng 2: mỗi khái niệm ít nhất 3 biến quan sát, có mã biến, nguồn APA 7, cột “đã điều chỉnh gì”, (R) cho câu ngược chiều; ĐT chia mỗi khái niệm 2–4 khía cạnh, mỗi khía cạnh 1–2 câu hỏi mở và câu gợi mở. Phút 117 báo còn 1 phút. 118–128 chặng 3: mũi tên có giả thuyết; cấp thang đo khớp kế hoạch phân tích. 128–134 đổi phiếu nhóm chéo; 134–138 hai nhóm chia sẻ.
 Xử lý: nhóm có 6–8 biến độc lập → giữ 3–4; ĐT viết câu đóng → đổi thành câu mở.
 Câu chốt: “Mỗi ô trong mô hình phải có một bộ biến quan sát trong bảng thang đo, và mỗi biến phải có một dòng trong kế hoạch phân tích.”</a:t>
@@ -5327,7 +5340,8 @@
           <a:p>
             <a:r>
               <a:rPr lang="en-US" dirty="0"/>
-              <a:t>Phân đoạn kết buổi 8 phút: phiếu ra về hai câu, giao bài tập về nhà, nhắc bài giữa kỳ và nối sang Buổi 10. Không cắt phân đoạn này.
+              <a:t>Thời gian: phút 138–146 của buổi học.
+Phân đoạn kết buổi 8 phút: phiếu ra về hai câu, giao bài tập về nhà, nhắc bài giữa kỳ và nối sang Buổi 10. Không cắt phân đoạn này.
 Phát giấy nhỏ cho phiếu ra về trước khi chiếu slide sau, để sinh viên viết ngay. Còn 4 phút dự phòng cuối buổi (146–150) nếu phần chia sẻ của thực hành kéo dài.
 Trước khi chuyển sang slide đầu tiên của phân đoạn, nói một câu nối với phần vừa học để lớp thấy mạch bài, và nhắc lớp giữ đề tài của nhóm mình trong đầu khi nghe ví dụ.</a:t>
             </a:r>
@@ -5869,7 +5883,8 @@
           <a:p>
             <a:r>
               <a:rPr lang="en-US" dirty="0"/>
-              <a:t>Phân đoạn 10 phút về khái niệm đo lường: định nghĩa, thuộc tính so với đối tượng, ba thuật ngữ khái niệm – biến quan sát – thang đo, hai quy tắc duy nhất và nhất quán, và ý nghĩa của đo lường.
+              <a:t>Thời gian: phút 10–20 của buổi học.
+Phân đoạn 10 phút về khái niệm đo lường: định nghĩa, thuộc tính so với đối tượng, ba thuật ngữ khái niệm – biến quan sát – thang đo, hai quy tắc duy nhất và nhất quán, và ý nghĩa của đo lường.
 Giữ nhịp nhanh: phần này nhiều định nghĩa nhưng sinh viên chỉ cần nắm chữ “thuộc tính” và chữ “quy tắc”. Thời gian dành cho bốn cấp thang đo ở phân đoạn sau quan trọng hơn.
 Trước khi chuyển sang slide đầu tiên của phân đoạn, nói một câu nối với phần vừa học để lớp thấy mạch bài, và nhắc lớp giữ đề tài của nhóm mình trong đầu khi nghe ví dụ.</a:t>
             </a:r>
@@ -6192,8 +6207,8 @@
         </p:nvSpPr>
         <p:spPr>
           <a:xfrm>
-            <a:off x="3840480" y="2103120"/>
-            <a:ext cx="6766560" cy="2194560"/>
+            <a:off x="3840480" y="2240280"/>
+            <a:ext cx="6766560" cy="2377440"/>
           </a:xfrm>
           <a:prstGeom prst="rect">
             <a:avLst/>
@@ -9828,49 +9843,7 @@
       </p:sp>
       <p:sp>
         <p:nvSpPr>
-          <p:cNvPr id="8" name="Text 6"/>
-          <p:cNvSpPr txBox="1"/>
-          <p:nvPr/>
-        </p:nvSpPr>
-        <p:spPr>
-          <a:xfrm>
-            <a:off x="3840480" y="1417320"/>
-            <a:ext cx="6766560" cy="594360"/>
-          </a:xfrm>
-          <a:prstGeom prst="rect">
-            <a:avLst/>
-          </a:prstGeom>
-          <a:noFill/>
-          <a:ln/>
-        </p:spPr>
-        <p:txBody>
-          <a:bodyPr wrap="square" lIns="76200" tIns="76200" rIns="76200" bIns="76200" rtlCol="0" anchor="t"/>
-          <a:lstStyle/>
-          <a:p>
-            <a:pPr algn="l" indent="0" marL="0">
-              <a:lnSpc>
-                <a:spcPts val="3600"/>
-              </a:lnSpc>
-              <a:buNone/>
-            </a:pPr>
-            <a:r>
-              <a:rPr lang="en-US" sz="2800" b="1" dirty="0">
-                <a:solidFill>
-                  <a:srgbClr val="962B7C"/>
-                </a:solidFill>
-                <a:latin typeface="Alexandria" pitchFamily="34" charset="0"/>
-                <a:ea typeface="Alexandria" pitchFamily="34" charset="-122"/>
-                <a:cs typeface="Alexandria" pitchFamily="34" charset="-120"/>
-              </a:rPr>
-              <a:t>20–38 phút</a:t>
-            </a:r>
-            <a:endParaRPr lang="en-US" sz="2800" dirty="0"/>
-          </a:p>
-        </p:txBody>
-      </p:sp>
-      <p:sp>
-        <p:nvSpPr>
-          <p:cNvPr id="9" name="Text 0"/>
+          <p:cNvPr id="8" name="Text 0"/>
           <p:cNvSpPr/>
           <p:nvPr>
             <p:ph idx="100" type="title" hasCustomPrompt="1"/>
@@ -9878,8 +9851,8 @@
         </p:nvSpPr>
         <p:spPr>
           <a:xfrm>
-            <a:off x="3840480" y="2103120"/>
-            <a:ext cx="6766560" cy="2194560"/>
+            <a:off x="3840480" y="2240280"/>
+            <a:ext cx="6766560" cy="2377440"/>
           </a:xfrm>
           <a:prstGeom prst="rect">
             <a:avLst/>
@@ -9888,7 +9861,7 @@
           <a:ln/>
         </p:spPr>
         <p:txBody>
-          <a:bodyPr wrap="square" lIns="76200" tIns="76200" rIns="76200" bIns="76200" rtlCol="0" anchor="t"/>
+          <a:bodyPr wrap="square" lIns="76200" tIns="76200" rIns="76200" bIns="76200" rtlCol="0" anchor="ctr"/>
           <a:lstStyle/>
           <a:p>
             <a:pPr algn="l" indent="0" marL="0">
@@ -14849,49 +14822,7 @@
       </p:sp>
       <p:sp>
         <p:nvSpPr>
-          <p:cNvPr id="8" name="Text 6"/>
-          <p:cNvSpPr txBox="1"/>
-          <p:nvPr/>
-        </p:nvSpPr>
-        <p:spPr>
-          <a:xfrm>
-            <a:off x="3840480" y="1417320"/>
-            <a:ext cx="6766560" cy="594360"/>
-          </a:xfrm>
-          <a:prstGeom prst="rect">
-            <a:avLst/>
-          </a:prstGeom>
-          <a:noFill/>
-          <a:ln/>
-        </p:spPr>
-        <p:txBody>
-          <a:bodyPr wrap="square" lIns="76200" tIns="76200" rIns="76200" bIns="76200" rtlCol="0" anchor="t"/>
-          <a:lstStyle/>
-          <a:p>
-            <a:pPr algn="l" indent="0" marL="0">
-              <a:lnSpc>
-                <a:spcPts val="3600"/>
-              </a:lnSpc>
-              <a:buNone/>
-            </a:pPr>
-            <a:r>
-              <a:rPr lang="en-US" sz="2800" b="1" dirty="0">
-                <a:solidFill>
-                  <a:srgbClr val="962B7C"/>
-                </a:solidFill>
-                <a:latin typeface="Alexandria" pitchFamily="34" charset="0"/>
-                <a:ea typeface="Alexandria" pitchFamily="34" charset="-122"/>
-                <a:cs typeface="Alexandria" pitchFamily="34" charset="-120"/>
-              </a:rPr>
-              <a:t>0–7 phút</a:t>
-            </a:r>
-            <a:endParaRPr lang="en-US" sz="2800" dirty="0"/>
-          </a:p>
-        </p:txBody>
-      </p:sp>
-      <p:sp>
-        <p:nvSpPr>
-          <p:cNvPr id="9" name="Text 0"/>
+          <p:cNvPr id="8" name="Text 0"/>
           <p:cNvSpPr/>
           <p:nvPr>
             <p:ph idx="100" type="title" hasCustomPrompt="1"/>
@@ -14899,8 +14830,8 @@
         </p:nvSpPr>
         <p:spPr>
           <a:xfrm>
-            <a:off x="3840480" y="2103120"/>
-            <a:ext cx="6766560" cy="2194560"/>
+            <a:off x="3840480" y="2240280"/>
+            <a:ext cx="6766560" cy="2377440"/>
           </a:xfrm>
           <a:prstGeom prst="rect">
             <a:avLst/>
@@ -14909,7 +14840,7 @@
           <a:ln/>
         </p:spPr>
         <p:txBody>
-          <a:bodyPr wrap="square" lIns="76200" tIns="76200" rIns="76200" bIns="76200" rtlCol="0" anchor="t"/>
+          <a:bodyPr wrap="square" lIns="76200" tIns="76200" rIns="76200" bIns="76200" rtlCol="0" anchor="ctr"/>
           <a:lstStyle/>
           <a:p>
             <a:pPr algn="l" indent="0" marL="0">
@@ -19011,49 +18942,7 @@
       </p:sp>
       <p:sp>
         <p:nvSpPr>
-          <p:cNvPr id="8" name="Text 6"/>
-          <p:cNvSpPr txBox="1"/>
-          <p:nvPr/>
-        </p:nvSpPr>
-        <p:spPr>
-          <a:xfrm>
-            <a:off x="3840480" y="1417320"/>
-            <a:ext cx="6766560" cy="594360"/>
-          </a:xfrm>
-          <a:prstGeom prst="rect">
-            <a:avLst/>
-          </a:prstGeom>
-          <a:noFill/>
-          <a:ln/>
-        </p:spPr>
-        <p:txBody>
-          <a:bodyPr wrap="square" lIns="76200" tIns="76200" rIns="76200" bIns="76200" rtlCol="0" anchor="t"/>
-          <a:lstStyle/>
-          <a:p>
-            <a:pPr algn="l" indent="0" marL="0">
-              <a:lnSpc>
-                <a:spcPts val="3600"/>
-              </a:lnSpc>
-              <a:buNone/>
-            </a:pPr>
-            <a:r>
-              <a:rPr lang="en-US" sz="2800" b="1" dirty="0">
-                <a:solidFill>
-                  <a:srgbClr val="962B7C"/>
-                </a:solidFill>
-                <a:latin typeface="Alexandria" pitchFamily="34" charset="0"/>
-                <a:ea typeface="Alexandria" pitchFamily="34" charset="-122"/>
-                <a:cs typeface="Alexandria" pitchFamily="34" charset="-120"/>
-              </a:rPr>
-              <a:t>38–45 phút</a:t>
-            </a:r>
-            <a:endParaRPr lang="en-US" sz="2800" dirty="0"/>
-          </a:p>
-        </p:txBody>
-      </p:sp>
-      <p:sp>
-        <p:nvSpPr>
-          <p:cNvPr id="9" name="Text 0"/>
+          <p:cNvPr id="8" name="Text 0"/>
           <p:cNvSpPr/>
           <p:nvPr>
             <p:ph idx="100" type="title" hasCustomPrompt="1"/>
@@ -19061,8 +18950,8 @@
         </p:nvSpPr>
         <p:spPr>
           <a:xfrm>
-            <a:off x="3840480" y="2103120"/>
-            <a:ext cx="6766560" cy="2194560"/>
+            <a:off x="3840480" y="2240280"/>
+            <a:ext cx="6766560" cy="2377440"/>
           </a:xfrm>
           <a:prstGeom prst="rect">
             <a:avLst/>
@@ -19071,7 +18960,7 @@
           <a:ln/>
         </p:spPr>
         <p:txBody>
-          <a:bodyPr wrap="square" lIns="76200" tIns="76200" rIns="76200" bIns="76200" rtlCol="0" anchor="t"/>
+          <a:bodyPr wrap="square" lIns="76200" tIns="76200" rIns="76200" bIns="76200" rtlCol="0" anchor="ctr"/>
           <a:lstStyle/>
           <a:p>
             <a:pPr algn="l" indent="0" marL="0">
@@ -24643,49 +24532,7 @@
       </p:sp>
       <p:sp>
         <p:nvSpPr>
-          <p:cNvPr id="8" name="Text 6"/>
-          <p:cNvSpPr txBox="1"/>
-          <p:nvPr/>
-        </p:nvSpPr>
-        <p:spPr>
-          <a:xfrm>
-            <a:off x="3840480" y="1417320"/>
-            <a:ext cx="6766560" cy="594360"/>
-          </a:xfrm>
-          <a:prstGeom prst="rect">
-            <a:avLst/>
-          </a:prstGeom>
-          <a:noFill/>
-          <a:ln/>
-        </p:spPr>
-        <p:txBody>
-          <a:bodyPr wrap="square" lIns="76200" tIns="76200" rIns="76200" bIns="76200" rtlCol="0" anchor="t"/>
-          <a:lstStyle/>
-          <a:p>
-            <a:pPr algn="l" indent="0" marL="0">
-              <a:lnSpc>
-                <a:spcPts val="3600"/>
-              </a:lnSpc>
-              <a:buNone/>
-            </a:pPr>
-            <a:r>
-              <a:rPr lang="en-US" sz="2800" b="1" dirty="0">
-                <a:solidFill>
-                  <a:srgbClr val="962B7C"/>
-                </a:solidFill>
-                <a:latin typeface="Alexandria" pitchFamily="34" charset="0"/>
-                <a:ea typeface="Alexandria" pitchFamily="34" charset="-122"/>
-                <a:cs typeface="Alexandria" pitchFamily="34" charset="-120"/>
-              </a:rPr>
-              <a:t>45–52 phút</a:t>
-            </a:r>
-            <a:endParaRPr lang="en-US" sz="2800" dirty="0"/>
-          </a:p>
-        </p:txBody>
-      </p:sp>
-      <p:sp>
-        <p:nvSpPr>
-          <p:cNvPr id="9" name="Text 0"/>
+          <p:cNvPr id="8" name="Text 0"/>
           <p:cNvSpPr/>
           <p:nvPr>
             <p:ph idx="100" type="title" hasCustomPrompt="1"/>
@@ -24693,8 +24540,8 @@
         </p:nvSpPr>
         <p:spPr>
           <a:xfrm>
-            <a:off x="3840480" y="2103120"/>
-            <a:ext cx="6766560" cy="2194560"/>
+            <a:off x="3840480" y="2240280"/>
+            <a:ext cx="6766560" cy="2377440"/>
           </a:xfrm>
           <a:prstGeom prst="rect">
             <a:avLst/>
@@ -24703,7 +24550,7 @@
           <a:ln/>
         </p:spPr>
         <p:txBody>
-          <a:bodyPr wrap="square" lIns="76200" tIns="76200" rIns="76200" bIns="76200" rtlCol="0" anchor="t"/>
+          <a:bodyPr wrap="square" lIns="76200" tIns="76200" rIns="76200" bIns="76200" rtlCol="0" anchor="ctr"/>
           <a:lstStyle/>
           <a:p>
             <a:pPr algn="l" indent="0" marL="0">
@@ -24884,7 +24731,7 @@
               <a:buNone/>
             </a:pPr>
             <a:r>
-              <a:rPr lang="en-US" sz="3400" b="1" dirty="0">
+              <a:rPr lang="en-US" sz="3600" b="1" dirty="0">
                 <a:solidFill>
                   <a:srgbClr val="2E2A3A"/>
                 </a:solidFill>
@@ -24892,9 +24739,9 @@
                 <a:ea typeface="Alexandria" pitchFamily="34" charset="-122"/>
                 <a:cs typeface="Alexandria" pitchFamily="34" charset="-120"/>
               </a:rPr>
-              <a:t>Đố cấp thang đo: 20 giây bàn với bạn, rồi giơ tay</a:t>
-            </a:r>
-            <a:endParaRPr lang="en-US" sz="3400" dirty="0"/>
+              <a:t>Đố cấp thang đo: bàn với bạn, rồi giơ tay</a:t>
+            </a:r>
+            <a:endParaRPr lang="en-US" sz="3600" dirty="0"/>
           </a:p>
         </p:txBody>
       </p:sp>
@@ -27577,7 +27424,7 @@
                 <a:ea typeface="Alexandria" pitchFamily="34" charset="-122"/>
                 <a:cs typeface="Alexandria" pitchFamily="34" charset="-120"/>
               </a:rPr>
-              <a:t>Câu 5–8: đọc nhanh, 20 giây, giơ tay</a:t>
+              <a:t>Câu 5–8: đọc nhanh, rồi giơ tay</a:t>
             </a:r>
             <a:endParaRPr lang="en-US" sz="3600" dirty="0"/>
           </a:p>
@@ -31659,7 +31506,7 @@
                 <a:ea typeface="Alexandria" pitchFamily="34" charset="-122"/>
                 <a:cs typeface="Alexandria" pitchFamily="34" charset="-120"/>
               </a:rPr>
-              <a:t>15'</a:t>
+              <a:t>Nghỉ</a:t>
             </a:r>
             <a:endParaRPr lang="en-US" sz="9600" dirty="0"/>
           </a:p>
@@ -31701,7 +31548,7 @@
                 <a:ea typeface="Alexandria" pitchFamily="34" charset="-122"/>
                 <a:cs typeface="Alexandria" pitchFamily="34" charset="-120"/>
               </a:rPr>
-              <a:t>Giải lao 15 phút</a:t>
+              <a:t>Giải lao</a:t>
             </a:r>
             <a:endParaRPr lang="en-US" sz="4800" dirty="0"/>
           </a:p>
@@ -31963,49 +31810,7 @@
       </p:sp>
       <p:sp>
         <p:nvSpPr>
-          <p:cNvPr id="8" name="Text 6"/>
-          <p:cNvSpPr txBox="1"/>
-          <p:nvPr/>
-        </p:nvSpPr>
-        <p:spPr>
-          <a:xfrm>
-            <a:off x="3840480" y="1417320"/>
-            <a:ext cx="6766560" cy="594360"/>
-          </a:xfrm>
-          <a:prstGeom prst="rect">
-            <a:avLst/>
-          </a:prstGeom>
-          <a:noFill/>
-          <a:ln/>
-        </p:spPr>
-        <p:txBody>
-          <a:bodyPr wrap="square" lIns="76200" tIns="76200" rIns="76200" bIns="76200" rtlCol="0" anchor="t"/>
-          <a:lstStyle/>
-          <a:p>
-            <a:pPr algn="l" indent="0" marL="0">
-              <a:lnSpc>
-                <a:spcPts val="3600"/>
-              </a:lnSpc>
-              <a:buNone/>
-            </a:pPr>
-            <a:r>
-              <a:rPr lang="en-US" sz="2800" b="1" dirty="0">
-                <a:solidFill>
-                  <a:srgbClr val="962B7C"/>
-                </a:solidFill>
-                <a:latin typeface="Alexandria" pitchFamily="34" charset="0"/>
-                <a:ea typeface="Alexandria" pitchFamily="34" charset="-122"/>
-                <a:cs typeface="Alexandria" pitchFamily="34" charset="-120"/>
-              </a:rPr>
-              <a:t>7–10 phút</a:t>
-            </a:r>
-            <a:endParaRPr lang="en-US" sz="2800" dirty="0"/>
-          </a:p>
-        </p:txBody>
-      </p:sp>
-      <p:sp>
-        <p:nvSpPr>
-          <p:cNvPr id="9" name="Text 0"/>
+          <p:cNvPr id="8" name="Text 0"/>
           <p:cNvSpPr/>
           <p:nvPr>
             <p:ph idx="100" type="title" hasCustomPrompt="1"/>
@@ -32013,8 +31818,8 @@
         </p:nvSpPr>
         <p:spPr>
           <a:xfrm>
-            <a:off x="3840480" y="2103120"/>
-            <a:ext cx="6766560" cy="2194560"/>
+            <a:off x="3840480" y="2240280"/>
+            <a:ext cx="6766560" cy="2377440"/>
           </a:xfrm>
           <a:prstGeom prst="rect">
             <a:avLst/>
@@ -32023,7 +31828,7 @@
           <a:ln/>
         </p:spPr>
         <p:txBody>
-          <a:bodyPr wrap="square" lIns="76200" tIns="76200" rIns="76200" bIns="76200" rtlCol="0" anchor="t"/>
+          <a:bodyPr wrap="square" lIns="76200" tIns="76200" rIns="76200" bIns="76200" rtlCol="0" anchor="ctr"/>
           <a:lstStyle/>
           <a:p>
             <a:pPr algn="l" indent="0" marL="0">
@@ -32258,49 +32063,7 @@
       </p:sp>
       <p:sp>
         <p:nvSpPr>
-          <p:cNvPr id="8" name="Text 6"/>
-          <p:cNvSpPr txBox="1"/>
-          <p:nvPr/>
-        </p:nvSpPr>
-        <p:spPr>
-          <a:xfrm>
-            <a:off x="3840480" y="1417320"/>
-            <a:ext cx="6766560" cy="594360"/>
-          </a:xfrm>
-          <a:prstGeom prst="rect">
-            <a:avLst/>
-          </a:prstGeom>
-          <a:noFill/>
-          <a:ln/>
-        </p:spPr>
-        <p:txBody>
-          <a:bodyPr wrap="square" lIns="76200" tIns="76200" rIns="76200" bIns="76200" rtlCol="0" anchor="t"/>
-          <a:lstStyle/>
-          <a:p>
-            <a:pPr algn="l" indent="0" marL="0">
-              <a:lnSpc>
-                <a:spcPts val="3600"/>
-              </a:lnSpc>
-              <a:buNone/>
-            </a:pPr>
-            <a:r>
-              <a:rPr lang="en-US" sz="2800" b="1" dirty="0">
-                <a:solidFill>
-                  <a:srgbClr val="962B7C"/>
-                </a:solidFill>
-                <a:latin typeface="Alexandria" pitchFamily="34" charset="0"/>
-                <a:ea typeface="Alexandria" pitchFamily="34" charset="-122"/>
-                <a:cs typeface="Alexandria" pitchFamily="34" charset="-120"/>
-              </a:rPr>
-              <a:t>67–85 phút</a:t>
-            </a:r>
-            <a:endParaRPr lang="en-US" sz="2800" dirty="0"/>
-          </a:p>
-        </p:txBody>
-      </p:sp>
-      <p:sp>
-        <p:nvSpPr>
-          <p:cNvPr id="9" name="Text 0"/>
+          <p:cNvPr id="8" name="Text 0"/>
           <p:cNvSpPr/>
           <p:nvPr>
             <p:ph idx="100" type="title" hasCustomPrompt="1"/>
@@ -32308,8 +32071,8 @@
         </p:nvSpPr>
         <p:spPr>
           <a:xfrm>
-            <a:off x="3840480" y="2103120"/>
-            <a:ext cx="6766560" cy="2194560"/>
+            <a:off x="3840480" y="2240280"/>
+            <a:ext cx="6766560" cy="2377440"/>
           </a:xfrm>
           <a:prstGeom prst="rect">
             <a:avLst/>
@@ -32318,7 +32081,7 @@
           <a:ln/>
         </p:spPr>
         <p:txBody>
-          <a:bodyPr wrap="square" lIns="76200" tIns="76200" rIns="76200" bIns="76200" rtlCol="0" anchor="t"/>
+          <a:bodyPr wrap="square" lIns="76200" tIns="76200" rIns="76200" bIns="76200" rtlCol="0" anchor="ctr"/>
           <a:lstStyle/>
           <a:p>
             <a:pPr algn="l" indent="0" marL="0">
@@ -40805,49 +40568,7 @@
       </p:sp>
       <p:sp>
         <p:nvSpPr>
-          <p:cNvPr id="8" name="Text 6"/>
-          <p:cNvSpPr txBox="1"/>
-          <p:nvPr/>
-        </p:nvSpPr>
-        <p:spPr>
-          <a:xfrm>
-            <a:off x="3840480" y="1417320"/>
-            <a:ext cx="6766560" cy="594360"/>
-          </a:xfrm>
-          <a:prstGeom prst="rect">
-            <a:avLst/>
-          </a:prstGeom>
-          <a:noFill/>
-          <a:ln/>
-        </p:spPr>
-        <p:txBody>
-          <a:bodyPr wrap="square" lIns="76200" tIns="76200" rIns="76200" bIns="76200" rtlCol="0" anchor="t"/>
-          <a:lstStyle/>
-          <a:p>
-            <a:pPr algn="l" indent="0" marL="0">
-              <a:lnSpc>
-                <a:spcPts val="3600"/>
-              </a:lnSpc>
-              <a:buNone/>
-            </a:pPr>
-            <a:r>
-              <a:rPr lang="en-US" sz="2800" b="1" dirty="0">
-                <a:solidFill>
-                  <a:srgbClr val="962B7C"/>
-                </a:solidFill>
-                <a:latin typeface="Alexandria" pitchFamily="34" charset="0"/>
-                <a:ea typeface="Alexandria" pitchFamily="34" charset="-122"/>
-                <a:cs typeface="Alexandria" pitchFamily="34" charset="-120"/>
-              </a:rPr>
-              <a:t>85–93 phút</a:t>
-            </a:r>
-            <a:endParaRPr lang="en-US" sz="2800" dirty="0"/>
-          </a:p>
-        </p:txBody>
-      </p:sp>
-      <p:sp>
-        <p:nvSpPr>
-          <p:cNvPr id="9" name="Text 0"/>
+          <p:cNvPr id="8" name="Text 0"/>
           <p:cNvSpPr/>
           <p:nvPr>
             <p:ph idx="100" type="title" hasCustomPrompt="1"/>
@@ -40855,8 +40576,8 @@
         </p:nvSpPr>
         <p:spPr>
           <a:xfrm>
-            <a:off x="3840480" y="2103120"/>
-            <a:ext cx="6766560" cy="2194560"/>
+            <a:off x="3840480" y="2240280"/>
+            <a:ext cx="6766560" cy="2377440"/>
           </a:xfrm>
           <a:prstGeom prst="rect">
             <a:avLst/>
@@ -40865,7 +40586,7 @@
           <a:ln/>
         </p:spPr>
         <p:txBody>
-          <a:bodyPr wrap="square" lIns="76200" tIns="76200" rIns="76200" bIns="76200" rtlCol="0" anchor="t"/>
+          <a:bodyPr wrap="square" lIns="76200" tIns="76200" rIns="76200" bIns="76200" rtlCol="0" anchor="ctr"/>
           <a:lstStyle/>
           <a:p>
             <a:pPr algn="l" indent="0" marL="0">
@@ -44702,49 +44423,7 @@
       </p:sp>
       <p:sp>
         <p:nvSpPr>
-          <p:cNvPr id="8" name="Text 6"/>
-          <p:cNvSpPr txBox="1"/>
-          <p:nvPr/>
-        </p:nvSpPr>
-        <p:spPr>
-          <a:xfrm>
-            <a:off x="3840480" y="1417320"/>
-            <a:ext cx="6766560" cy="594360"/>
-          </a:xfrm>
-          <a:prstGeom prst="rect">
-            <a:avLst/>
-          </a:prstGeom>
-          <a:noFill/>
-          <a:ln/>
-        </p:spPr>
-        <p:txBody>
-          <a:bodyPr wrap="square" lIns="76200" tIns="76200" rIns="76200" bIns="76200" rtlCol="0" anchor="t"/>
-          <a:lstStyle/>
-          <a:p>
-            <a:pPr algn="l" indent="0" marL="0">
-              <a:lnSpc>
-                <a:spcPts val="3600"/>
-              </a:lnSpc>
-              <a:buNone/>
-            </a:pPr>
-            <a:r>
-              <a:rPr lang="en-US" sz="2800" b="1" dirty="0">
-                <a:solidFill>
-                  <a:srgbClr val="962B7C"/>
-                </a:solidFill>
-                <a:latin typeface="Alexandria" pitchFamily="34" charset="0"/>
-                <a:ea typeface="Alexandria" pitchFamily="34" charset="-122"/>
-                <a:cs typeface="Alexandria" pitchFamily="34" charset="-120"/>
-              </a:rPr>
-              <a:t>93–138 phút</a:t>
-            </a:r>
-            <a:endParaRPr lang="en-US" sz="2800" dirty="0"/>
-          </a:p>
-        </p:txBody>
-      </p:sp>
-      <p:sp>
-        <p:nvSpPr>
-          <p:cNvPr id="9" name="Text 0"/>
+          <p:cNvPr id="8" name="Text 0"/>
           <p:cNvSpPr/>
           <p:nvPr>
             <p:ph idx="100" type="title" hasCustomPrompt="1"/>
@@ -44752,8 +44431,8 @@
         </p:nvSpPr>
         <p:spPr>
           <a:xfrm>
-            <a:off x="3840480" y="2103120"/>
-            <a:ext cx="6766560" cy="2194560"/>
+            <a:off x="3840480" y="2240280"/>
+            <a:ext cx="6766560" cy="2377440"/>
           </a:xfrm>
           <a:prstGeom prst="rect">
             <a:avLst/>
@@ -44762,7 +44441,7 @@
           <a:ln/>
         </p:spPr>
         <p:txBody>
-          <a:bodyPr wrap="square" lIns="76200" tIns="76200" rIns="76200" bIns="76200" rtlCol="0" anchor="t"/>
+          <a:bodyPr wrap="square" lIns="76200" tIns="76200" rIns="76200" bIns="76200" rtlCol="0" anchor="ctr"/>
           <a:lstStyle/>
           <a:p>
             <a:pPr algn="l" indent="0" marL="0">
@@ -44951,7 +44630,7 @@
                 <a:ea typeface="Alexandria" pitchFamily="34" charset="-122"/>
                 <a:cs typeface="Alexandria" pitchFamily="34" charset="-120"/>
               </a:rPr>
-              <a:t>Xưởng thang đo (45'): từ khái niệm đến bảng thang đo và mô hình của nhóm</a:t>
+              <a:t>Xưởng thang đo: từ khái niệm đến bảng thang đo và mô hình của nhóm</a:t>
             </a:r>
             <a:endParaRPr lang="en-US" sz="3400" dirty="0"/>
           </a:p>
@@ -44988,7 +44667,7 @@
         <p:spPr>
           <a:xfrm>
             <a:off x="640080" y="1828800"/>
-            <a:ext cx="1280160" cy="548640"/>
+            <a:ext cx="731520" cy="548640"/>
           </a:xfrm>
           <a:prstGeom prst="roundRect">
             <a:avLst>
@@ -45010,7 +44689,7 @@
         <p:spPr>
           <a:xfrm>
             <a:off x="640080" y="1828800"/>
-            <a:ext cx="1280160" cy="548640"/>
+            <a:ext cx="731520" cy="548640"/>
           </a:xfrm>
           <a:prstGeom prst="rect">
             <a:avLst/>
@@ -45037,7 +44716,7 @@
                 <a:ea typeface="Alexandria" pitchFamily="34" charset="-122"/>
                 <a:cs typeface="Alexandria" pitchFamily="34" charset="-120"/>
               </a:rPr>
-              <a:t>5'</a:t>
+              <a:t>1</a:t>
             </a:r>
             <a:endParaRPr lang="en-US" sz="2400" dirty="0"/>
           </a:p>
@@ -45051,8 +44730,8 @@
         </p:nvSpPr>
         <p:spPr>
           <a:xfrm>
-            <a:off x="2103120" y="1783080"/>
-            <a:ext cx="9372600" cy="640080"/>
+            <a:off x="1554480" y="1783080"/>
+            <a:ext cx="9921240" cy="640080"/>
           </a:xfrm>
           <a:prstGeom prst="rect">
             <a:avLst/>
@@ -45116,7 +44795,7 @@
         <p:spPr>
           <a:xfrm>
             <a:off x="640080" y="2606040"/>
-            <a:ext cx="1280160" cy="548640"/>
+            <a:ext cx="731520" cy="548640"/>
           </a:xfrm>
           <a:prstGeom prst="roundRect">
             <a:avLst>
@@ -45138,7 +44817,7 @@
         <p:spPr>
           <a:xfrm>
             <a:off x="640080" y="2606040"/>
-            <a:ext cx="1280160" cy="548640"/>
+            <a:ext cx="731520" cy="548640"/>
           </a:xfrm>
           <a:prstGeom prst="rect">
             <a:avLst/>
@@ -45165,7 +44844,7 @@
                 <a:ea typeface="Alexandria" pitchFamily="34" charset="-122"/>
                 <a:cs typeface="Alexandria" pitchFamily="34" charset="-120"/>
               </a:rPr>
-              <a:t>20'</a:t>
+              <a:t>2</a:t>
             </a:r>
             <a:endParaRPr lang="en-US" sz="2400" dirty="0"/>
           </a:p>
@@ -45179,8 +44858,8 @@
         </p:nvSpPr>
         <p:spPr>
           <a:xfrm>
-            <a:off x="2103120" y="2560320"/>
-            <a:ext cx="9372600" cy="640080"/>
+            <a:off x="1554480" y="2560320"/>
+            <a:ext cx="9921240" cy="640080"/>
           </a:xfrm>
           <a:prstGeom prst="rect">
             <a:avLst/>
@@ -45244,7 +44923,7 @@
         <p:spPr>
           <a:xfrm>
             <a:off x="640080" y="3383280"/>
-            <a:ext cx="1280160" cy="548640"/>
+            <a:ext cx="731520" cy="548640"/>
           </a:xfrm>
           <a:prstGeom prst="roundRect">
             <a:avLst>
@@ -45266,7 +44945,7 @@
         <p:spPr>
           <a:xfrm>
             <a:off x="640080" y="3383280"/>
-            <a:ext cx="1280160" cy="548640"/>
+            <a:ext cx="731520" cy="548640"/>
           </a:xfrm>
           <a:prstGeom prst="rect">
             <a:avLst/>
@@ -45293,7 +44972,7 @@
                 <a:ea typeface="Alexandria" pitchFamily="34" charset="-122"/>
                 <a:cs typeface="Alexandria" pitchFamily="34" charset="-120"/>
               </a:rPr>
-              <a:t>10'</a:t>
+              <a:t>3</a:t>
             </a:r>
             <a:endParaRPr lang="en-US" sz="2400" dirty="0"/>
           </a:p>
@@ -45307,8 +44986,8 @@
         </p:nvSpPr>
         <p:spPr>
           <a:xfrm>
-            <a:off x="2103120" y="3337560"/>
-            <a:ext cx="9372600" cy="640080"/>
+            <a:off x="1554480" y="3337560"/>
+            <a:ext cx="9921240" cy="640080"/>
           </a:xfrm>
           <a:prstGeom prst="rect">
             <a:avLst/>
@@ -45372,7 +45051,7 @@
         <p:spPr>
           <a:xfrm>
             <a:off x="640080" y="4160520"/>
-            <a:ext cx="1280160" cy="548640"/>
+            <a:ext cx="731520" cy="548640"/>
           </a:xfrm>
           <a:prstGeom prst="roundRect">
             <a:avLst>
@@ -45394,7 +45073,7 @@
         <p:spPr>
           <a:xfrm>
             <a:off x="640080" y="4160520"/>
-            <a:ext cx="1280160" cy="548640"/>
+            <a:ext cx="731520" cy="548640"/>
           </a:xfrm>
           <a:prstGeom prst="rect">
             <a:avLst/>
@@ -45421,7 +45100,7 @@
                 <a:ea typeface="Alexandria" pitchFamily="34" charset="-122"/>
                 <a:cs typeface="Alexandria" pitchFamily="34" charset="-120"/>
               </a:rPr>
-              <a:t>10'</a:t>
+              <a:t>4</a:t>
             </a:r>
             <a:endParaRPr lang="en-US" sz="2400" dirty="0"/>
           </a:p>
@@ -45435,8 +45114,8 @@
         </p:nvSpPr>
         <p:spPr>
           <a:xfrm>
-            <a:off x="2103120" y="4114800"/>
-            <a:ext cx="9372600" cy="640080"/>
+            <a:off x="1554480" y="4114800"/>
+            <a:ext cx="9921240" cy="640080"/>
           </a:xfrm>
           <a:prstGeom prst="rect">
             <a:avLst/>
@@ -45823,49 +45502,7 @@
       </p:sp>
       <p:sp>
         <p:nvSpPr>
-          <p:cNvPr id="8" name="Text 6"/>
-          <p:cNvSpPr txBox="1"/>
-          <p:nvPr/>
-        </p:nvSpPr>
-        <p:spPr>
-          <a:xfrm>
-            <a:off x="3840480" y="1417320"/>
-            <a:ext cx="6766560" cy="594360"/>
-          </a:xfrm>
-          <a:prstGeom prst="rect">
-            <a:avLst/>
-          </a:prstGeom>
-          <a:noFill/>
-          <a:ln/>
-        </p:spPr>
-        <p:txBody>
-          <a:bodyPr wrap="square" lIns="76200" tIns="76200" rIns="76200" bIns="76200" rtlCol="0" anchor="t"/>
-          <a:lstStyle/>
-          <a:p>
-            <a:pPr algn="l" indent="0" marL="0">
-              <a:lnSpc>
-                <a:spcPts val="3600"/>
-              </a:lnSpc>
-              <a:buNone/>
-            </a:pPr>
-            <a:r>
-              <a:rPr lang="en-US" sz="2800" b="1" dirty="0">
-                <a:solidFill>
-                  <a:srgbClr val="962B7C"/>
-                </a:solidFill>
-                <a:latin typeface="Alexandria" pitchFamily="34" charset="0"/>
-                <a:ea typeface="Alexandria" pitchFamily="34" charset="-122"/>
-                <a:cs typeface="Alexandria" pitchFamily="34" charset="-120"/>
-              </a:rPr>
-              <a:t>138–146 phút</a:t>
-            </a:r>
-            <a:endParaRPr lang="en-US" sz="2800" dirty="0"/>
-          </a:p>
-        </p:txBody>
-      </p:sp>
-      <p:sp>
-        <p:nvSpPr>
-          <p:cNvPr id="9" name="Text 0"/>
+          <p:cNvPr id="8" name="Text 0"/>
           <p:cNvSpPr/>
           <p:nvPr>
             <p:ph idx="100" type="title" hasCustomPrompt="1"/>
@@ -45873,8 +45510,8 @@
         </p:nvSpPr>
         <p:spPr>
           <a:xfrm>
-            <a:off x="3840480" y="2103120"/>
-            <a:ext cx="6766560" cy="2194560"/>
+            <a:off x="3840480" y="2240280"/>
+            <a:ext cx="6766560" cy="2377440"/>
           </a:xfrm>
           <a:prstGeom prst="rect">
             <a:avLst/>
@@ -45883,7 +45520,7 @@
           <a:ln/>
         </p:spPr>
         <p:txBody>
-          <a:bodyPr wrap="square" lIns="76200" tIns="76200" rIns="76200" bIns="76200" rtlCol="0" anchor="t"/>
+          <a:bodyPr wrap="square" lIns="76200" tIns="76200" rIns="76200" bIns="76200" rtlCol="0" anchor="ctr"/>
           <a:lstStyle/>
           <a:p>
             <a:pPr algn="l" indent="0" marL="0">
@@ -49292,49 +48929,7 @@
       </p:sp>
       <p:sp>
         <p:nvSpPr>
-          <p:cNvPr id="8" name="Text 6"/>
-          <p:cNvSpPr txBox="1"/>
-          <p:nvPr/>
-        </p:nvSpPr>
-        <p:spPr>
-          <a:xfrm>
-            <a:off x="3840480" y="1417320"/>
-            <a:ext cx="6766560" cy="594360"/>
-          </a:xfrm>
-          <a:prstGeom prst="rect">
-            <a:avLst/>
-          </a:prstGeom>
-          <a:noFill/>
-          <a:ln/>
-        </p:spPr>
-        <p:txBody>
-          <a:bodyPr wrap="square" lIns="76200" tIns="76200" rIns="76200" bIns="76200" rtlCol="0" anchor="t"/>
-          <a:lstStyle/>
-          <a:p>
-            <a:pPr algn="l" indent="0" marL="0">
-              <a:lnSpc>
-                <a:spcPts val="3600"/>
-              </a:lnSpc>
-              <a:buNone/>
-            </a:pPr>
-            <a:r>
-              <a:rPr lang="en-US" sz="2800" b="1" dirty="0">
-                <a:solidFill>
-                  <a:srgbClr val="962B7C"/>
-                </a:solidFill>
-                <a:latin typeface="Alexandria" pitchFamily="34" charset="0"/>
-                <a:ea typeface="Alexandria" pitchFamily="34" charset="-122"/>
-                <a:cs typeface="Alexandria" pitchFamily="34" charset="-120"/>
-              </a:rPr>
-              <a:t>10–20 phút</a:t>
-            </a:r>
-            <a:endParaRPr lang="en-US" sz="2800" dirty="0"/>
-          </a:p>
-        </p:txBody>
-      </p:sp>
-      <p:sp>
-        <p:nvSpPr>
-          <p:cNvPr id="9" name="Text 0"/>
+          <p:cNvPr id="8" name="Text 0"/>
           <p:cNvSpPr/>
           <p:nvPr>
             <p:ph idx="100" type="title" hasCustomPrompt="1"/>
@@ -49342,8 +48937,8 @@
         </p:nvSpPr>
         <p:spPr>
           <a:xfrm>
-            <a:off x="3840480" y="2103120"/>
-            <a:ext cx="6766560" cy="2194560"/>
+            <a:off x="3840480" y="2240280"/>
+            <a:ext cx="6766560" cy="2377440"/>
           </a:xfrm>
           <a:prstGeom prst="rect">
             <a:avLst/>
@@ -49352,7 +48947,7 @@
           <a:ln/>
         </p:spPr>
         <p:txBody>
-          <a:bodyPr wrap="square" lIns="76200" tIns="76200" rIns="76200" bIns="76200" rtlCol="0" anchor="t"/>
+          <a:bodyPr wrap="square" lIns="76200" tIns="76200" rIns="76200" bIns="76200" rtlCol="0" anchor="ctr"/>
           <a:lstStyle/>
           <a:p>
             <a:pPr algn="l" indent="0" marL="0">
